--- a/output/hifi.pptx
+++ b/output/hifi.pptx
@@ -633,15 +633,264 @@
           <a:chExt cx="0" cy="0"/>
         </a:xfrm>
       </p:grpSpPr>
-      <p:sp>
-        <p:nvSpPr>
-          <p:cNvPr id="2" name="TextBox 2"/>
-          <p:cNvSpPr txBox="1"/>
-          <p:nvPr/>
-        </p:nvSpPr>
-        <p:spPr>
-          <a:xfrm>
-            <a:off x="2682257" y="2108787"/>
+      <p:grpSp>
+        <p:nvGrpSpPr>
+          <p:cNvPr id="6" name="Group 6"/>
+          <p:cNvGrpSpPr/>
+          <p:nvPr/>
+        </p:nvGrpSpPr>
+        <p:grpSpPr>
+          <a:xfrm>
+            <a:off x="5998845" y="1457325"/>
+            <a:ext cx="194310" cy="340995"/>
+            <a:chOff x="5998845" y="1457325"/>
+            <a:chExt cx="194310" cy="340995"/>
+          </a:xfrm>
+        </p:grpSpPr>
+        <p:sp>
+          <p:nvSpPr>
+            <p:cNvPr id="2" name="Freeform 2"/>
+            <p:cNvSpPr/>
+            <p:nvPr/>
+          </p:nvSpPr>
+          <p:spPr>
+            <a:xfrm>
+              <a:off x="6035040" y="1457325"/>
+              <a:ext cx="121920" cy="243840"/>
+            </a:xfrm>
+            <a:custGeom>
+              <a:avLst/>
+              <a:gdLst/>
+              <a:ahLst/>
+              <a:cxnLst/>
+              <a:rect l="l" t="t" r="r" b="b"/>
+              <a:pathLst>
+                <a:path w="121920" h="243840">
+                  <a:moveTo>
+                    <a:pt x="0" y="0"/>
+                  </a:moveTo>
+                  <a:lnTo>
+                    <a:pt x="121920" y="36195"/>
+                  </a:lnTo>
+                  <a:lnTo>
+                    <a:pt x="109538" y="243840"/>
+                  </a:lnTo>
+                  <a:lnTo>
+                    <a:pt x="12382" y="243840"/>
+                  </a:lnTo>
+                  <a:lnTo>
+                    <a:pt x="0" y="0"/>
+                  </a:lnTo>
+                  <a:close/>
+                </a:path>
+              </a:pathLst>
+            </a:custGeom>
+            <a:noFill/>
+            <a:ln w="36195" cap="rnd">
+              <a:solidFill>
+                <a:schemeClr val="accent1"/>
+              </a:solidFill>
+              <a:round/>
+            </a:ln>
+          </p:spPr>
+        </p:sp>
+        <p:sp>
+          <p:nvSpPr>
+            <p:cNvPr id="3" name="Freeform 3"/>
+            <p:cNvSpPr/>
+            <p:nvPr/>
+          </p:nvSpPr>
+          <p:spPr>
+            <a:xfrm>
+              <a:off x="5998845" y="1701165"/>
+              <a:ext cx="60960" cy="97155"/>
+            </a:xfrm>
+            <a:custGeom>
+              <a:avLst/>
+              <a:gdLst/>
+              <a:ahLst/>
+              <a:cxnLst/>
+              <a:rect l="l" t="t" r="r" b="b"/>
+              <a:pathLst>
+                <a:path w="60960" h="97155">
+                  <a:moveTo>
+                    <a:pt x="48578" y="0"/>
+                  </a:moveTo>
+                  <a:lnTo>
+                    <a:pt x="0" y="97155"/>
+                  </a:lnTo>
+                  <a:lnTo>
+                    <a:pt x="60960" y="60960"/>
+                  </a:lnTo>
+                </a:path>
+              </a:pathLst>
+            </a:custGeom>
+            <a:noFill/>
+            <a:ln w="36195" cap="rnd">
+              <a:solidFill>
+                <a:schemeClr val="accent1"/>
+              </a:solidFill>
+              <a:round/>
+            </a:ln>
+          </p:spPr>
+        </p:sp>
+        <p:sp>
+          <p:nvSpPr>
+            <p:cNvPr id="4" name="Freeform 4"/>
+            <p:cNvSpPr/>
+            <p:nvPr/>
+          </p:nvSpPr>
+          <p:spPr>
+            <a:xfrm>
+              <a:off x="6132195" y="1701165"/>
+              <a:ext cx="60960" cy="97155"/>
+            </a:xfrm>
+            <a:custGeom>
+              <a:avLst/>
+              <a:gdLst/>
+              <a:ahLst/>
+              <a:cxnLst/>
+              <a:rect l="l" t="t" r="r" b="b"/>
+              <a:pathLst>
+                <a:path w="60960" h="97155">
+                  <a:moveTo>
+                    <a:pt x="12383" y="0"/>
+                  </a:moveTo>
+                  <a:lnTo>
+                    <a:pt x="60960" y="97155"/>
+                  </a:lnTo>
+                  <a:lnTo>
+                    <a:pt x="0" y="60960"/>
+                  </a:lnTo>
+                </a:path>
+              </a:pathLst>
+            </a:custGeom>
+            <a:noFill/>
+            <a:ln w="36195" cap="rnd">
+              <a:solidFill>
+                <a:schemeClr val="accent1"/>
+              </a:solidFill>
+              <a:round/>
+            </a:ln>
+          </p:spPr>
+        </p:sp>
+        <p:sp>
+          <p:nvSpPr>
+            <p:cNvPr id="5" name="Freeform 5"/>
+            <p:cNvSpPr/>
+            <p:nvPr/>
+          </p:nvSpPr>
+          <p:spPr>
+            <a:xfrm>
+              <a:off x="6059805" y="1518285"/>
+              <a:ext cx="72390" cy="72390"/>
+            </a:xfrm>
+            <a:custGeom>
+              <a:avLst/>
+              <a:gdLst/>
+              <a:ahLst/>
+              <a:cxnLst/>
+              <a:rect l="l" t="t" r="r" b="b"/>
+              <a:pathLst>
+                <a:path w="72390" h="72390">
+                  <a:moveTo>
+                    <a:pt x="72390" y="36195"/>
+                  </a:moveTo>
+                  <a:lnTo>
+                    <a:pt x="71438" y="45720"/>
+                  </a:lnTo>
+                  <a:lnTo>
+                    <a:pt x="67627" y="54292"/>
+                  </a:lnTo>
+                  <a:lnTo>
+                    <a:pt x="61912" y="61912"/>
+                  </a:lnTo>
+                  <a:lnTo>
+                    <a:pt x="54292" y="67627"/>
+                  </a:lnTo>
+                  <a:lnTo>
+                    <a:pt x="45720" y="71438"/>
+                  </a:lnTo>
+                  <a:lnTo>
+                    <a:pt x="36195" y="72390"/>
+                  </a:lnTo>
+                  <a:lnTo>
+                    <a:pt x="26670" y="71438"/>
+                  </a:lnTo>
+                  <a:lnTo>
+                    <a:pt x="18097" y="67627"/>
+                  </a:lnTo>
+                  <a:lnTo>
+                    <a:pt x="10477" y="61912"/>
+                  </a:lnTo>
+                  <a:lnTo>
+                    <a:pt x="4762" y="54292"/>
+                  </a:lnTo>
+                  <a:lnTo>
+                    <a:pt x="952" y="45720"/>
+                  </a:lnTo>
+                  <a:lnTo>
+                    <a:pt x="0" y="36195"/>
+                  </a:lnTo>
+                  <a:lnTo>
+                    <a:pt x="952" y="26670"/>
+                  </a:lnTo>
+                  <a:lnTo>
+                    <a:pt x="4762" y="18098"/>
+                  </a:lnTo>
+                  <a:lnTo>
+                    <a:pt x="10477" y="10477"/>
+                  </a:lnTo>
+                  <a:lnTo>
+                    <a:pt x="18097" y="4762"/>
+                  </a:lnTo>
+                  <a:lnTo>
+                    <a:pt x="26670" y="952"/>
+                  </a:lnTo>
+                  <a:lnTo>
+                    <a:pt x="36195" y="0"/>
+                  </a:lnTo>
+                  <a:lnTo>
+                    <a:pt x="45720" y="952"/>
+                  </a:lnTo>
+                  <a:lnTo>
+                    <a:pt x="54292" y="4762"/>
+                  </a:lnTo>
+                  <a:lnTo>
+                    <a:pt x="61912" y="10477"/>
+                  </a:lnTo>
+                  <a:lnTo>
+                    <a:pt x="67627" y="18098"/>
+                  </a:lnTo>
+                  <a:lnTo>
+                    <a:pt x="71438" y="26670"/>
+                  </a:lnTo>
+                  <a:lnTo>
+                    <a:pt x="72390" y="36195"/>
+                  </a:lnTo>
+                  <a:close/>
+                </a:path>
+              </a:pathLst>
+            </a:custGeom>
+            <a:noFill/>
+            <a:ln w="36195" cap="rnd">
+              <a:solidFill>
+                <a:schemeClr val="accent1"/>
+              </a:solidFill>
+              <a:round/>
+            </a:ln>
+          </p:spPr>
+        </p:sp>
+      </p:grpSp>
+      <p:sp>
+        <p:nvSpPr>
+          <p:cNvPr id="7" name="TextBox 7"/>
+          <p:cNvSpPr txBox="1"/>
+          <p:nvPr/>
+        </p:nvSpPr>
+        <p:spPr>
+          <a:xfrm>
+            <a:off x="2682257" y="2383107"/>
             <a:ext cx="6827486" cy="894874"/>
           </a:xfrm>
           <a:prstGeom prst="rect">
@@ -675,7 +924,7 @@
       </p:sp>
       <p:sp>
         <p:nvSpPr>
-          <p:cNvPr id="3" name="TextBox 3"/>
+          <p:cNvPr id="8" name="TextBox 8"/>
           <p:cNvSpPr txBox="1"/>
           <p:nvPr/>
         </p:nvSpPr>
@@ -715,7 +964,7 @@
       </p:sp>
       <p:sp>
         <p:nvSpPr>
-          <p:cNvPr id="4" name="TextBox 4"/>
+          <p:cNvPr id="9" name="TextBox 9"/>
           <p:cNvSpPr txBox="1"/>
           <p:nvPr/>
         </p:nvSpPr>
@@ -789,9 +1038,104 @@
           <a:chExt cx="0" cy="0"/>
         </a:xfrm>
       </p:grpSpPr>
-      <p:sp>
-        <p:nvSpPr>
-          <p:cNvPr id="2" name="TextBox 2"/>
+      <p:grpSp>
+        <p:nvGrpSpPr>
+          <p:cNvPr id="4" name="Group 4"/>
+          <p:cNvGrpSpPr/>
+          <p:nvPr/>
+        </p:nvGrpSpPr>
+        <p:grpSpPr>
+          <a:xfrm>
+            <a:off x="969645" y="1701165"/>
+            <a:ext cx="316230" cy="194310"/>
+            <a:chOff x="969645" y="1701165"/>
+            <a:chExt cx="316230" cy="194310"/>
+          </a:xfrm>
+        </p:grpSpPr>
+        <p:sp>
+          <p:nvSpPr>
+            <p:cNvPr id="2" name="Freeform 2"/>
+            <p:cNvSpPr/>
+            <p:nvPr/>
+          </p:nvSpPr>
+          <p:spPr>
+            <a:xfrm>
+              <a:off x="969645" y="1701165"/>
+              <a:ext cx="121920" cy="194310"/>
+            </a:xfrm>
+            <a:custGeom>
+              <a:avLst/>
+              <a:gdLst/>
+              <a:ahLst/>
+              <a:cxnLst/>
+              <a:rect l="l" t="t" r="r" b="b"/>
+              <a:pathLst>
+                <a:path w="121920" h="194310">
+                  <a:moveTo>
+                    <a:pt x="0" y="0"/>
+                  </a:moveTo>
+                  <a:lnTo>
+                    <a:pt x="0" y="194310"/>
+                  </a:lnTo>
+                  <a:lnTo>
+                    <a:pt x="121920" y="194310"/>
+                  </a:lnTo>
+                </a:path>
+              </a:pathLst>
+            </a:custGeom>
+            <a:noFill/>
+            <a:ln w="36195" cap="rnd">
+              <a:solidFill>
+                <a:schemeClr val="accent1"/>
+              </a:solidFill>
+              <a:round/>
+            </a:ln>
+          </p:spPr>
+        </p:sp>
+        <p:sp>
+          <p:nvSpPr>
+            <p:cNvPr id="3" name="Freeform 3"/>
+            <p:cNvSpPr/>
+            <p:nvPr/>
+          </p:nvSpPr>
+          <p:spPr>
+            <a:xfrm>
+              <a:off x="1163955" y="1701165"/>
+              <a:ext cx="121920" cy="194310"/>
+            </a:xfrm>
+            <a:custGeom>
+              <a:avLst/>
+              <a:gdLst/>
+              <a:ahLst/>
+              <a:cxnLst/>
+              <a:rect l="l" t="t" r="r" b="b"/>
+              <a:pathLst>
+                <a:path w="121920" h="194310">
+                  <a:moveTo>
+                    <a:pt x="0" y="0"/>
+                  </a:moveTo>
+                  <a:lnTo>
+                    <a:pt x="0" y="194310"/>
+                  </a:lnTo>
+                  <a:lnTo>
+                    <a:pt x="121920" y="194310"/>
+                  </a:lnTo>
+                </a:path>
+              </a:pathLst>
+            </a:custGeom>
+            <a:noFill/>
+            <a:ln w="36195" cap="rnd">
+              <a:solidFill>
+                <a:schemeClr val="accent1"/>
+              </a:solidFill>
+              <a:round/>
+            </a:ln>
+          </p:spPr>
+        </p:sp>
+      </p:grpSp>
+      <p:sp>
+        <p:nvSpPr>
+          <p:cNvPr id="5" name="TextBox 5"/>
           <p:cNvSpPr txBox="1"/>
           <p:nvPr/>
         </p:nvSpPr>
@@ -831,7 +1175,7 @@
       </p:sp>
       <p:sp>
         <p:nvSpPr>
-          <p:cNvPr id="3" name="TextBox 3"/>
+          <p:cNvPr id="6" name="TextBox 6"/>
           <p:cNvSpPr txBox="1"/>
           <p:nvPr/>
         </p:nvSpPr>
@@ -871,7 +1215,7 @@
       </p:sp>
       <p:sp>
         <p:nvSpPr>
-          <p:cNvPr id="4" name="TextBox 4"/>
+          <p:cNvPr id="7" name="TextBox 7"/>
           <p:cNvSpPr txBox="1"/>
           <p:nvPr/>
         </p:nvSpPr>
@@ -911,7 +1255,7 @@
       </p:sp>
       <p:sp>
         <p:nvSpPr>
-          <p:cNvPr id="5" name="TextBox 5"/>
+          <p:cNvPr id="8" name="TextBox 8"/>
           <p:cNvSpPr txBox="1"/>
           <p:nvPr/>
         </p:nvSpPr>
@@ -951,7 +1295,7 @@
       </p:sp>
       <p:sp>
         <p:nvSpPr>
-          <p:cNvPr id="6" name="TextBox 6"/>
+          <p:cNvPr id="9" name="TextBox 9"/>
           <p:cNvSpPr txBox="1"/>
           <p:nvPr/>
         </p:nvSpPr>
@@ -1025,15 +1369,177 @@
           <a:chExt cx="0" cy="0"/>
         </a:xfrm>
       </p:grpSpPr>
-      <p:sp>
-        <p:nvSpPr>
-          <p:cNvPr id="2" name="TextBox 2"/>
-          <p:cNvSpPr txBox="1"/>
-          <p:nvPr/>
-        </p:nvSpPr>
-        <p:spPr>
-          <a:xfrm>
-            <a:off x="534429" y="369522"/>
+      <p:grpSp>
+        <p:nvGrpSpPr>
+          <p:cNvPr id="4" name="Group 4"/>
+          <p:cNvGrpSpPr/>
+          <p:nvPr/>
+        </p:nvGrpSpPr>
+        <p:grpSpPr>
+          <a:xfrm>
+            <a:off x="598170" y="433388"/>
+            <a:ext cx="256222" cy="256223"/>
+            <a:chOff x="598170" y="433388"/>
+            <a:chExt cx="256222" cy="256223"/>
+          </a:xfrm>
+        </p:grpSpPr>
+        <p:sp>
+          <p:nvSpPr>
+            <p:cNvPr id="2" name="Freeform 2"/>
+            <p:cNvSpPr/>
+            <p:nvPr/>
+          </p:nvSpPr>
+          <p:spPr>
+            <a:xfrm>
+              <a:off x="598170" y="433388"/>
+              <a:ext cx="256222" cy="256223"/>
+            </a:xfrm>
+            <a:custGeom>
+              <a:avLst/>
+              <a:gdLst/>
+              <a:ahLst/>
+              <a:cxnLst/>
+              <a:rect l="l" t="t" r="r" b="b"/>
+              <a:pathLst>
+                <a:path w="256222" h="256223">
+                  <a:moveTo>
+                    <a:pt x="256222" y="128588"/>
+                  </a:moveTo>
+                  <a:lnTo>
+                    <a:pt x="251460" y="160972"/>
+                  </a:lnTo>
+                  <a:lnTo>
+                    <a:pt x="239078" y="192405"/>
+                  </a:lnTo>
+                  <a:lnTo>
+                    <a:pt x="219075" y="219075"/>
+                  </a:lnTo>
+                  <a:lnTo>
+                    <a:pt x="192405" y="239077"/>
+                  </a:lnTo>
+                  <a:lnTo>
+                    <a:pt x="160972" y="251460"/>
+                  </a:lnTo>
+                  <a:lnTo>
+                    <a:pt x="128587" y="256223"/>
+                  </a:lnTo>
+                  <a:lnTo>
+                    <a:pt x="95250" y="251460"/>
+                  </a:lnTo>
+                  <a:lnTo>
+                    <a:pt x="63817" y="239077"/>
+                  </a:lnTo>
+                  <a:lnTo>
+                    <a:pt x="38100" y="219075"/>
+                  </a:lnTo>
+                  <a:lnTo>
+                    <a:pt x="17145" y="192405"/>
+                  </a:lnTo>
+                  <a:lnTo>
+                    <a:pt x="4762" y="160972"/>
+                  </a:lnTo>
+                  <a:lnTo>
+                    <a:pt x="0" y="128588"/>
+                  </a:lnTo>
+                  <a:lnTo>
+                    <a:pt x="4762" y="95250"/>
+                  </a:lnTo>
+                  <a:lnTo>
+                    <a:pt x="17145" y="63817"/>
+                  </a:lnTo>
+                  <a:lnTo>
+                    <a:pt x="38100" y="38100"/>
+                  </a:lnTo>
+                  <a:lnTo>
+                    <a:pt x="63817" y="17145"/>
+                  </a:lnTo>
+                  <a:lnTo>
+                    <a:pt x="95250" y="4762"/>
+                  </a:lnTo>
+                  <a:lnTo>
+                    <a:pt x="128587" y="0"/>
+                  </a:lnTo>
+                  <a:lnTo>
+                    <a:pt x="160972" y="4762"/>
+                  </a:lnTo>
+                  <a:lnTo>
+                    <a:pt x="192405" y="17145"/>
+                  </a:lnTo>
+                  <a:lnTo>
+                    <a:pt x="219075" y="38100"/>
+                  </a:lnTo>
+                  <a:lnTo>
+                    <a:pt x="239078" y="63817"/>
+                  </a:lnTo>
+                  <a:lnTo>
+                    <a:pt x="251460" y="95250"/>
+                  </a:lnTo>
+                  <a:lnTo>
+                    <a:pt x="256222" y="128588"/>
+                  </a:lnTo>
+                  <a:close/>
+                </a:path>
+              </a:pathLst>
+            </a:custGeom>
+            <a:noFill/>
+            <a:ln w="20955" cap="rnd">
+              <a:solidFill>
+                <a:schemeClr val="accent1"/>
+              </a:solidFill>
+              <a:round/>
+            </a:ln>
+          </p:spPr>
+        </p:sp>
+        <p:sp>
+          <p:nvSpPr>
+            <p:cNvPr id="3" name="Freeform 3"/>
+            <p:cNvSpPr/>
+            <p:nvPr/>
+          </p:nvSpPr>
+          <p:spPr>
+            <a:xfrm>
+              <a:off x="661988" y="511492"/>
+              <a:ext cx="135255" cy="106680"/>
+            </a:xfrm>
+            <a:custGeom>
+              <a:avLst/>
+              <a:gdLst/>
+              <a:ahLst/>
+              <a:cxnLst/>
+              <a:rect l="l" t="t" r="r" b="b"/>
+              <a:pathLst>
+                <a:path w="135255" h="106680">
+                  <a:moveTo>
+                    <a:pt x="0" y="57150"/>
+                  </a:moveTo>
+                  <a:lnTo>
+                    <a:pt x="50482" y="106680"/>
+                  </a:lnTo>
+                  <a:lnTo>
+                    <a:pt x="135255" y="0"/>
+                  </a:lnTo>
+                </a:path>
+              </a:pathLst>
+            </a:custGeom>
+            <a:noFill/>
+            <a:ln w="20955" cap="rnd">
+              <a:solidFill>
+                <a:schemeClr val="accent1"/>
+              </a:solidFill>
+              <a:round/>
+            </a:ln>
+          </p:spPr>
+        </p:sp>
+      </p:grpSp>
+      <p:sp>
+        <p:nvSpPr>
+          <p:cNvPr id="5" name="TextBox 5"/>
+          <p:cNvSpPr txBox="1"/>
+          <p:nvPr/>
+        </p:nvSpPr>
+        <p:spPr>
+          <a:xfrm>
+            <a:off x="1083069" y="369522"/>
             <a:ext cx="819281" cy="547135"/>
           </a:xfrm>
           <a:prstGeom prst="rect">
@@ -1067,13 +1573,13 @@
       </p:sp>
       <p:sp>
         <p:nvSpPr>
-          <p:cNvPr id="3" name="Rectangle 3"/>
+          <p:cNvPr id="6" name="Rectangle 6"/>
           <p:cNvSpPr/>
           <p:nvPr/>
         </p:nvSpPr>
         <p:spPr>
           <a:xfrm>
-            <a:off x="548640" y="1023938"/>
+            <a:off x="1097280" y="1023938"/>
             <a:ext cx="2011680" cy="38100"/>
           </a:xfrm>
           <a:prstGeom prst="rect">
@@ -1089,7 +1595,7 @@
       </p:sp>
       <p:sp>
         <p:nvSpPr>
-          <p:cNvPr id="4" name="Rectangle 4"/>
+          <p:cNvPr id="7" name="Rectangle 7"/>
           <p:cNvSpPr/>
           <p:nvPr/>
         </p:nvSpPr>
@@ -1111,7 +1617,7 @@
       </p:sp>
       <p:sp>
         <p:nvSpPr>
-          <p:cNvPr id="5" name="TextBox 5"/>
+          <p:cNvPr id="8" name="TextBox 8"/>
           <p:cNvSpPr txBox="1"/>
           <p:nvPr/>
         </p:nvSpPr>
@@ -1151,7 +1657,7 @@
       </p:sp>
       <p:sp>
         <p:nvSpPr>
-          <p:cNvPr id="6" name="Rectangle 6"/>
+          <p:cNvPr id="9" name="Rectangle 9"/>
           <p:cNvSpPr/>
           <p:nvPr/>
         </p:nvSpPr>
@@ -1173,7 +1679,7 @@
       </p:sp>
       <p:sp>
         <p:nvSpPr>
-          <p:cNvPr id="7" name="TextBox 7"/>
+          <p:cNvPr id="10" name="TextBox 10"/>
           <p:cNvSpPr txBox="1"/>
           <p:nvPr/>
         </p:nvSpPr>
@@ -1213,7 +1719,7 @@
       </p:sp>
       <p:sp>
         <p:nvSpPr>
-          <p:cNvPr id="8" name="Rectangle 8"/>
+          <p:cNvPr id="11" name="Rectangle 11"/>
           <p:cNvSpPr/>
           <p:nvPr/>
         </p:nvSpPr>
@@ -1235,7 +1741,7 @@
       </p:sp>
       <p:sp>
         <p:nvSpPr>
-          <p:cNvPr id="9" name="TextBox 9"/>
+          <p:cNvPr id="12" name="TextBox 12"/>
           <p:cNvSpPr txBox="1"/>
           <p:nvPr/>
         </p:nvSpPr>
@@ -1275,7 +1781,7 @@
       </p:sp>
       <p:sp>
         <p:nvSpPr>
-          <p:cNvPr id="10" name="Rectangle 10"/>
+          <p:cNvPr id="13" name="Rectangle 13"/>
           <p:cNvSpPr/>
           <p:nvPr/>
         </p:nvSpPr>
@@ -1297,7 +1803,7 @@
       </p:sp>
       <p:sp>
         <p:nvSpPr>
-          <p:cNvPr id="11" name="TextBox 11"/>
+          <p:cNvPr id="14" name="TextBox 14"/>
           <p:cNvSpPr txBox="1"/>
           <p:nvPr/>
         </p:nvSpPr>
@@ -1337,7 +1843,7 @@
       </p:sp>
       <p:sp>
         <p:nvSpPr>
-          <p:cNvPr id="12" name="TextBox 12"/>
+          <p:cNvPr id="15" name="TextBox 15"/>
           <p:cNvSpPr txBox="1"/>
           <p:nvPr/>
         </p:nvSpPr>
@@ -1377,7 +1883,7 @@
       </p:sp>
       <p:sp>
         <p:nvSpPr>
-          <p:cNvPr id="13" name="TextBox 13"/>
+          <p:cNvPr id="16" name="TextBox 16"/>
           <p:cNvSpPr txBox="1"/>
           <p:nvPr/>
         </p:nvSpPr>
@@ -1451,15 +1957,117 @@
           <a:chExt cx="0" cy="0"/>
         </a:xfrm>
       </p:grpSpPr>
-      <p:sp>
-        <p:nvSpPr>
-          <p:cNvPr id="2" name="TextBox 2"/>
-          <p:cNvSpPr txBox="1"/>
-          <p:nvPr/>
-        </p:nvSpPr>
-        <p:spPr>
-          <a:xfrm>
-            <a:off x="5059985" y="2016442"/>
+      <p:grpSp>
+        <p:nvGrpSpPr>
+          <p:cNvPr id="4" name="Group 4"/>
+          <p:cNvGrpSpPr/>
+          <p:nvPr/>
+        </p:nvGrpSpPr>
+        <p:grpSpPr>
+          <a:xfrm>
+            <a:off x="5913120" y="1463040"/>
+            <a:ext cx="365760" cy="243840"/>
+            <a:chOff x="5913120" y="1463040"/>
+            <a:chExt cx="365760" cy="243840"/>
+          </a:xfrm>
+        </p:grpSpPr>
+        <p:sp>
+          <p:nvSpPr>
+            <p:cNvPr id="2" name="Freeform 2"/>
+            <p:cNvSpPr/>
+            <p:nvPr/>
+          </p:nvSpPr>
+          <p:spPr>
+            <a:xfrm>
+              <a:off x="5913120" y="1463040"/>
+              <a:ext cx="365760" cy="243840"/>
+            </a:xfrm>
+            <a:custGeom>
+              <a:avLst/>
+              <a:gdLst/>
+              <a:ahLst/>
+              <a:cxnLst/>
+              <a:rect l="l" t="t" r="r" b="b"/>
+              <a:pathLst>
+                <a:path w="365760" h="243840">
+                  <a:moveTo>
+                    <a:pt x="0" y="0"/>
+                  </a:moveTo>
+                  <a:lnTo>
+                    <a:pt x="365760" y="0"/>
+                  </a:lnTo>
+                  <a:lnTo>
+                    <a:pt x="365760" y="243840"/>
+                  </a:lnTo>
+                  <a:lnTo>
+                    <a:pt x="0" y="243840"/>
+                  </a:lnTo>
+                  <a:lnTo>
+                    <a:pt x="0" y="0"/>
+                  </a:lnTo>
+                  <a:close/>
+                </a:path>
+              </a:pathLst>
+            </a:custGeom>
+            <a:noFill/>
+            <a:ln w="36195" cap="rnd">
+              <a:solidFill>
+                <a:schemeClr val="accent1"/>
+              </a:solidFill>
+              <a:round/>
+            </a:ln>
+          </p:spPr>
+        </p:sp>
+        <p:sp>
+          <p:nvSpPr>
+            <p:cNvPr id="3" name="Freeform 3"/>
+            <p:cNvSpPr/>
+            <p:nvPr/>
+          </p:nvSpPr>
+          <p:spPr>
+            <a:xfrm>
+              <a:off x="5913120" y="1463040"/>
+              <a:ext cx="365760" cy="134302"/>
+            </a:xfrm>
+            <a:custGeom>
+              <a:avLst/>
+              <a:gdLst/>
+              <a:ahLst/>
+              <a:cxnLst/>
+              <a:rect l="l" t="t" r="r" b="b"/>
+              <a:pathLst>
+                <a:path w="365760" h="134302">
+                  <a:moveTo>
+                    <a:pt x="0" y="0"/>
+                  </a:moveTo>
+                  <a:lnTo>
+                    <a:pt x="182880" y="134302"/>
+                  </a:lnTo>
+                  <a:lnTo>
+                    <a:pt x="365760" y="0"/>
+                  </a:lnTo>
+                </a:path>
+              </a:pathLst>
+            </a:custGeom>
+            <a:noFill/>
+            <a:ln w="36195" cap="rnd">
+              <a:solidFill>
+                <a:schemeClr val="accent1"/>
+              </a:solidFill>
+              <a:round/>
+            </a:ln>
+          </p:spPr>
+        </p:sp>
+      </p:grpSp>
+      <p:sp>
+        <p:nvSpPr>
+          <p:cNvPr id="5" name="TextBox 5"/>
+          <p:cNvSpPr txBox="1"/>
+          <p:nvPr/>
+        </p:nvSpPr>
+        <p:spPr>
+          <a:xfrm>
+            <a:off x="5059985" y="2199322"/>
             <a:ext cx="2072030" cy="704088"/>
           </a:xfrm>
           <a:prstGeom prst="rect">
@@ -1493,13 +2101,13 @@
       </p:sp>
       <p:sp>
         <p:nvSpPr>
-          <p:cNvPr id="3" name="TextBox 3"/>
-          <p:cNvSpPr txBox="1"/>
-          <p:nvPr/>
-        </p:nvSpPr>
-        <p:spPr>
-          <a:xfrm>
-            <a:off x="4227655" y="3110817"/>
+          <p:cNvPr id="6" name="TextBox 6"/>
+          <p:cNvSpPr txBox="1"/>
+          <p:nvPr/>
+        </p:nvSpPr>
+        <p:spPr>
+          <a:xfrm>
+            <a:off x="4227655" y="3293697"/>
             <a:ext cx="3736690" cy="312439"/>
           </a:xfrm>
           <a:prstGeom prst="rect">
@@ -1533,7 +2141,7 @@
       </p:sp>
       <p:sp>
         <p:nvSpPr>
-          <p:cNvPr id="4" name="TextBox 4"/>
+          <p:cNvPr id="7" name="TextBox 7"/>
           <p:cNvSpPr txBox="1"/>
           <p:nvPr/>
         </p:nvSpPr>
@@ -1573,7 +2181,7 @@
       </p:sp>
       <p:sp>
         <p:nvSpPr>
-          <p:cNvPr id="5" name="TextBox 5"/>
+          <p:cNvPr id="8" name="TextBox 8"/>
           <p:cNvSpPr txBox="1"/>
           <p:nvPr/>
         </p:nvSpPr>
@@ -1647,15 +2255,462 @@
           <a:chExt cx="0" cy="0"/>
         </a:xfrm>
       </p:grpSpPr>
-      <p:sp>
-        <p:nvSpPr>
-          <p:cNvPr id="2" name="TextBox 2"/>
-          <p:cNvSpPr txBox="1"/>
-          <p:nvPr/>
-        </p:nvSpPr>
-        <p:spPr>
-          <a:xfrm>
-            <a:off x="534429" y="369522"/>
+      <p:grpSp>
+        <p:nvGrpSpPr>
+          <p:cNvPr id="8" name="Group 8"/>
+          <p:cNvGrpSpPr/>
+          <p:nvPr/>
+        </p:nvGrpSpPr>
+        <p:grpSpPr>
+          <a:xfrm>
+            <a:off x="605790" y="476250"/>
+            <a:ext cx="213360" cy="170497"/>
+            <a:chOff x="605790" y="476250"/>
+            <a:chExt cx="213360" cy="170497"/>
+          </a:xfrm>
+        </p:grpSpPr>
+        <p:sp>
+          <p:nvSpPr>
+            <p:cNvPr id="2" name="Freeform 2"/>
+            <p:cNvSpPr/>
+            <p:nvPr/>
+          </p:nvSpPr>
+          <p:spPr>
+            <a:xfrm>
+              <a:off x="655320" y="490538"/>
+              <a:ext cx="163830" cy="9525"/>
+            </a:xfrm>
+            <a:custGeom>
+              <a:avLst/>
+              <a:gdLst/>
+              <a:ahLst/>
+              <a:cxnLst/>
+              <a:rect l="l" t="t" r="r" b="b"/>
+              <a:pathLst>
+                <a:path w="163830" h="9525">
+                  <a:moveTo>
+                    <a:pt x="0" y="0"/>
+                  </a:moveTo>
+                  <a:lnTo>
+                    <a:pt x="163830" y="0"/>
+                  </a:lnTo>
+                </a:path>
+              </a:pathLst>
+            </a:custGeom>
+            <a:noFill/>
+            <a:ln w="20955" cap="rnd">
+              <a:solidFill>
+                <a:schemeClr val="accent1"/>
+              </a:solidFill>
+              <a:round/>
+            </a:ln>
+          </p:spPr>
+        </p:sp>
+        <p:sp>
+          <p:nvSpPr>
+            <p:cNvPr id="3" name="Freeform 3"/>
+            <p:cNvSpPr/>
+            <p:nvPr/>
+          </p:nvSpPr>
+          <p:spPr>
+            <a:xfrm>
+              <a:off x="655320" y="561975"/>
+              <a:ext cx="163830" cy="9525"/>
+            </a:xfrm>
+            <a:custGeom>
+              <a:avLst/>
+              <a:gdLst/>
+              <a:ahLst/>
+              <a:cxnLst/>
+              <a:rect l="l" t="t" r="r" b="b"/>
+              <a:pathLst>
+                <a:path w="163830" h="9525">
+                  <a:moveTo>
+                    <a:pt x="0" y="0"/>
+                  </a:moveTo>
+                  <a:lnTo>
+                    <a:pt x="163830" y="0"/>
+                  </a:lnTo>
+                </a:path>
+              </a:pathLst>
+            </a:custGeom>
+            <a:noFill/>
+            <a:ln w="20955" cap="rnd">
+              <a:solidFill>
+                <a:schemeClr val="accent1"/>
+              </a:solidFill>
+              <a:round/>
+            </a:ln>
+          </p:spPr>
+        </p:sp>
+        <p:sp>
+          <p:nvSpPr>
+            <p:cNvPr id="4" name="Freeform 4"/>
+            <p:cNvSpPr/>
+            <p:nvPr/>
+          </p:nvSpPr>
+          <p:spPr>
+            <a:xfrm>
+              <a:off x="655320" y="632460"/>
+              <a:ext cx="163830" cy="9525"/>
+            </a:xfrm>
+            <a:custGeom>
+              <a:avLst/>
+              <a:gdLst/>
+              <a:ahLst/>
+              <a:cxnLst/>
+              <a:rect l="l" t="t" r="r" b="b"/>
+              <a:pathLst>
+                <a:path w="163830" h="9525">
+                  <a:moveTo>
+                    <a:pt x="0" y="0"/>
+                  </a:moveTo>
+                  <a:lnTo>
+                    <a:pt x="163830" y="0"/>
+                  </a:lnTo>
+                </a:path>
+              </a:pathLst>
+            </a:custGeom>
+            <a:noFill/>
+            <a:ln w="20955" cap="rnd">
+              <a:solidFill>
+                <a:schemeClr val="accent1"/>
+              </a:solidFill>
+              <a:round/>
+            </a:ln>
+          </p:spPr>
+        </p:sp>
+        <p:sp>
+          <p:nvSpPr>
+            <p:cNvPr id="5" name="Freeform 5"/>
+            <p:cNvSpPr/>
+            <p:nvPr/>
+          </p:nvSpPr>
+          <p:spPr>
+            <a:xfrm>
+              <a:off x="605790" y="476250"/>
+              <a:ext cx="28575" cy="28575"/>
+            </a:xfrm>
+            <a:custGeom>
+              <a:avLst/>
+              <a:gdLst/>
+              <a:ahLst/>
+              <a:cxnLst/>
+              <a:rect l="l" t="t" r="r" b="b"/>
+              <a:pathLst>
+                <a:path w="28575" h="28575">
+                  <a:moveTo>
+                    <a:pt x="28575" y="14288"/>
+                  </a:moveTo>
+                  <a:lnTo>
+                    <a:pt x="27622" y="18097"/>
+                  </a:lnTo>
+                  <a:lnTo>
+                    <a:pt x="26670" y="20955"/>
+                  </a:lnTo>
+                  <a:lnTo>
+                    <a:pt x="23812" y="24765"/>
+                  </a:lnTo>
+                  <a:lnTo>
+                    <a:pt x="20955" y="26670"/>
+                  </a:lnTo>
+                  <a:lnTo>
+                    <a:pt x="18097" y="27622"/>
+                  </a:lnTo>
+                  <a:lnTo>
+                    <a:pt x="14287" y="28575"/>
+                  </a:lnTo>
+                  <a:lnTo>
+                    <a:pt x="10478" y="27622"/>
+                  </a:lnTo>
+                  <a:lnTo>
+                    <a:pt x="6667" y="26670"/>
+                  </a:lnTo>
+                  <a:lnTo>
+                    <a:pt x="3810" y="24765"/>
+                  </a:lnTo>
+                  <a:lnTo>
+                    <a:pt x="1905" y="20955"/>
+                  </a:lnTo>
+                  <a:lnTo>
+                    <a:pt x="0" y="18097"/>
+                  </a:lnTo>
+                  <a:lnTo>
+                    <a:pt x="0" y="14288"/>
+                  </a:lnTo>
+                  <a:lnTo>
+                    <a:pt x="0" y="10477"/>
+                  </a:lnTo>
+                  <a:lnTo>
+                    <a:pt x="1905" y="7620"/>
+                  </a:lnTo>
+                  <a:lnTo>
+                    <a:pt x="3810" y="3810"/>
+                  </a:lnTo>
+                  <a:lnTo>
+                    <a:pt x="6667" y="1905"/>
+                  </a:lnTo>
+                  <a:lnTo>
+                    <a:pt x="10478" y="952"/>
+                  </a:lnTo>
+                  <a:lnTo>
+                    <a:pt x="14287" y="0"/>
+                  </a:lnTo>
+                  <a:lnTo>
+                    <a:pt x="18097" y="952"/>
+                  </a:lnTo>
+                  <a:lnTo>
+                    <a:pt x="20955" y="1905"/>
+                  </a:lnTo>
+                  <a:lnTo>
+                    <a:pt x="23812" y="3810"/>
+                  </a:lnTo>
+                  <a:lnTo>
+                    <a:pt x="26670" y="7620"/>
+                  </a:lnTo>
+                  <a:lnTo>
+                    <a:pt x="27622" y="10477"/>
+                  </a:lnTo>
+                  <a:lnTo>
+                    <a:pt x="28575" y="14288"/>
+                  </a:lnTo>
+                  <a:close/>
+                </a:path>
+              </a:pathLst>
+            </a:custGeom>
+            <a:noFill/>
+            <a:ln w="20955" cap="rnd">
+              <a:solidFill>
+                <a:schemeClr val="accent1"/>
+              </a:solidFill>
+              <a:round/>
+            </a:ln>
+          </p:spPr>
+        </p:sp>
+        <p:sp>
+          <p:nvSpPr>
+            <p:cNvPr id="6" name="Freeform 6"/>
+            <p:cNvSpPr/>
+            <p:nvPr/>
+          </p:nvSpPr>
+          <p:spPr>
+            <a:xfrm>
+              <a:off x="605790" y="547688"/>
+              <a:ext cx="28575" cy="28575"/>
+            </a:xfrm>
+            <a:custGeom>
+              <a:avLst/>
+              <a:gdLst/>
+              <a:ahLst/>
+              <a:cxnLst/>
+              <a:rect l="l" t="t" r="r" b="b"/>
+              <a:pathLst>
+                <a:path w="28575" h="28575">
+                  <a:moveTo>
+                    <a:pt x="28575" y="14288"/>
+                  </a:moveTo>
+                  <a:lnTo>
+                    <a:pt x="27622" y="18097"/>
+                  </a:lnTo>
+                  <a:lnTo>
+                    <a:pt x="26670" y="20955"/>
+                  </a:lnTo>
+                  <a:lnTo>
+                    <a:pt x="23812" y="23812"/>
+                  </a:lnTo>
+                  <a:lnTo>
+                    <a:pt x="20955" y="26670"/>
+                  </a:lnTo>
+                  <a:lnTo>
+                    <a:pt x="18097" y="27622"/>
+                  </a:lnTo>
+                  <a:lnTo>
+                    <a:pt x="14287" y="28575"/>
+                  </a:lnTo>
+                  <a:lnTo>
+                    <a:pt x="10478" y="27622"/>
+                  </a:lnTo>
+                  <a:lnTo>
+                    <a:pt x="6667" y="26670"/>
+                  </a:lnTo>
+                  <a:lnTo>
+                    <a:pt x="3810" y="23812"/>
+                  </a:lnTo>
+                  <a:lnTo>
+                    <a:pt x="1905" y="20955"/>
+                  </a:lnTo>
+                  <a:lnTo>
+                    <a:pt x="0" y="18097"/>
+                  </a:lnTo>
+                  <a:lnTo>
+                    <a:pt x="0" y="14288"/>
+                  </a:lnTo>
+                  <a:lnTo>
+                    <a:pt x="0" y="10477"/>
+                  </a:lnTo>
+                  <a:lnTo>
+                    <a:pt x="1905" y="6667"/>
+                  </a:lnTo>
+                  <a:lnTo>
+                    <a:pt x="3810" y="3810"/>
+                  </a:lnTo>
+                  <a:lnTo>
+                    <a:pt x="6667" y="1905"/>
+                  </a:lnTo>
+                  <a:lnTo>
+                    <a:pt x="10478" y="0"/>
+                  </a:lnTo>
+                  <a:lnTo>
+                    <a:pt x="14287" y="0"/>
+                  </a:lnTo>
+                  <a:lnTo>
+                    <a:pt x="18097" y="0"/>
+                  </a:lnTo>
+                  <a:lnTo>
+                    <a:pt x="20955" y="1905"/>
+                  </a:lnTo>
+                  <a:lnTo>
+                    <a:pt x="23812" y="3810"/>
+                  </a:lnTo>
+                  <a:lnTo>
+                    <a:pt x="26670" y="6667"/>
+                  </a:lnTo>
+                  <a:lnTo>
+                    <a:pt x="27622" y="10477"/>
+                  </a:lnTo>
+                  <a:lnTo>
+                    <a:pt x="28575" y="14288"/>
+                  </a:lnTo>
+                  <a:close/>
+                </a:path>
+              </a:pathLst>
+            </a:custGeom>
+            <a:noFill/>
+            <a:ln w="20955" cap="rnd">
+              <a:solidFill>
+                <a:schemeClr val="accent1"/>
+              </a:solidFill>
+              <a:round/>
+            </a:ln>
+          </p:spPr>
+        </p:sp>
+        <p:sp>
+          <p:nvSpPr>
+            <p:cNvPr id="7" name="Freeform 7"/>
+            <p:cNvSpPr/>
+            <p:nvPr/>
+          </p:nvSpPr>
+          <p:spPr>
+            <a:xfrm>
+              <a:off x="605790" y="618172"/>
+              <a:ext cx="28575" cy="28575"/>
+            </a:xfrm>
+            <a:custGeom>
+              <a:avLst/>
+              <a:gdLst/>
+              <a:ahLst/>
+              <a:cxnLst/>
+              <a:rect l="l" t="t" r="r" b="b"/>
+              <a:pathLst>
+                <a:path w="28575" h="28575">
+                  <a:moveTo>
+                    <a:pt x="28575" y="14288"/>
+                  </a:moveTo>
+                  <a:lnTo>
+                    <a:pt x="27622" y="18097"/>
+                  </a:lnTo>
+                  <a:lnTo>
+                    <a:pt x="26670" y="21907"/>
+                  </a:lnTo>
+                  <a:lnTo>
+                    <a:pt x="23812" y="24765"/>
+                  </a:lnTo>
+                  <a:lnTo>
+                    <a:pt x="20955" y="26670"/>
+                  </a:lnTo>
+                  <a:lnTo>
+                    <a:pt x="18097" y="28575"/>
+                  </a:lnTo>
+                  <a:lnTo>
+                    <a:pt x="14287" y="28575"/>
+                  </a:lnTo>
+                  <a:lnTo>
+                    <a:pt x="10478" y="28575"/>
+                  </a:lnTo>
+                  <a:lnTo>
+                    <a:pt x="6667" y="26670"/>
+                  </a:lnTo>
+                  <a:lnTo>
+                    <a:pt x="3810" y="24765"/>
+                  </a:lnTo>
+                  <a:lnTo>
+                    <a:pt x="1905" y="21907"/>
+                  </a:lnTo>
+                  <a:lnTo>
+                    <a:pt x="0" y="18097"/>
+                  </a:lnTo>
+                  <a:lnTo>
+                    <a:pt x="0" y="14288"/>
+                  </a:lnTo>
+                  <a:lnTo>
+                    <a:pt x="0" y="10477"/>
+                  </a:lnTo>
+                  <a:lnTo>
+                    <a:pt x="1905" y="7620"/>
+                  </a:lnTo>
+                  <a:lnTo>
+                    <a:pt x="3810" y="4762"/>
+                  </a:lnTo>
+                  <a:lnTo>
+                    <a:pt x="6667" y="1905"/>
+                  </a:lnTo>
+                  <a:lnTo>
+                    <a:pt x="10478" y="952"/>
+                  </a:lnTo>
+                  <a:lnTo>
+                    <a:pt x="14287" y="0"/>
+                  </a:lnTo>
+                  <a:lnTo>
+                    <a:pt x="18097" y="952"/>
+                  </a:lnTo>
+                  <a:lnTo>
+                    <a:pt x="20955" y="1905"/>
+                  </a:lnTo>
+                  <a:lnTo>
+                    <a:pt x="23812" y="4762"/>
+                  </a:lnTo>
+                  <a:lnTo>
+                    <a:pt x="26670" y="7620"/>
+                  </a:lnTo>
+                  <a:lnTo>
+                    <a:pt x="27622" y="10477"/>
+                  </a:lnTo>
+                  <a:lnTo>
+                    <a:pt x="28575" y="14288"/>
+                  </a:lnTo>
+                  <a:close/>
+                </a:path>
+              </a:pathLst>
+            </a:custGeom>
+            <a:noFill/>
+            <a:ln w="20955" cap="rnd">
+              <a:solidFill>
+                <a:schemeClr val="accent1"/>
+              </a:solidFill>
+              <a:round/>
+            </a:ln>
+          </p:spPr>
+        </p:sp>
+      </p:grpSp>
+      <p:sp>
+        <p:nvSpPr>
+          <p:cNvPr id="9" name="TextBox 9"/>
+          <p:cNvSpPr txBox="1"/>
+          <p:nvPr/>
+        </p:nvSpPr>
+        <p:spPr>
+          <a:xfrm>
+            <a:off x="1083069" y="369522"/>
             <a:ext cx="819281" cy="547135"/>
           </a:xfrm>
           <a:prstGeom prst="rect">
@@ -1689,13 +2744,13 @@
       </p:sp>
       <p:sp>
         <p:nvSpPr>
-          <p:cNvPr id="3" name="Rectangle 3"/>
+          <p:cNvPr id="10" name="Rectangle 10"/>
           <p:cNvSpPr/>
           <p:nvPr/>
         </p:nvSpPr>
         <p:spPr>
           <a:xfrm>
-            <a:off x="548640" y="1023938"/>
+            <a:off x="1097280" y="1023938"/>
             <a:ext cx="2011680" cy="38100"/>
           </a:xfrm>
           <a:prstGeom prst="rect">
@@ -1711,7 +2766,7 @@
       </p:sp>
       <p:sp>
         <p:nvSpPr>
-          <p:cNvPr id="4" name="TextBox 4"/>
+          <p:cNvPr id="11" name="TextBox 11"/>
           <p:cNvSpPr txBox="1"/>
           <p:nvPr/>
         </p:nvSpPr>
@@ -1751,7 +2806,7 @@
       </p:sp>
       <p:sp>
         <p:nvSpPr>
-          <p:cNvPr id="5" name="TextBox 5"/>
+          <p:cNvPr id="12" name="TextBox 12"/>
           <p:cNvSpPr txBox="1"/>
           <p:nvPr/>
         </p:nvSpPr>
@@ -1791,7 +2846,7 @@
       </p:sp>
       <p:sp>
         <p:nvSpPr>
-          <p:cNvPr id="6" name="Line 6"/>
+          <p:cNvPr id="13" name="Line 13"/>
           <p:cNvSpPr/>
           <p:nvPr/>
         </p:nvSpPr>
@@ -1827,7 +2882,7 @@
       </p:sp>
       <p:sp>
         <p:nvSpPr>
-          <p:cNvPr id="7" name="TextBox 7"/>
+          <p:cNvPr id="14" name="TextBox 14"/>
           <p:cNvSpPr txBox="1"/>
           <p:nvPr/>
         </p:nvSpPr>
@@ -1867,7 +2922,7 @@
       </p:sp>
       <p:sp>
         <p:nvSpPr>
-          <p:cNvPr id="8" name="TextBox 8"/>
+          <p:cNvPr id="15" name="TextBox 15"/>
           <p:cNvSpPr txBox="1"/>
           <p:nvPr/>
         </p:nvSpPr>
@@ -1907,7 +2962,7 @@
       </p:sp>
       <p:sp>
         <p:nvSpPr>
-          <p:cNvPr id="9" name="Line 9"/>
+          <p:cNvPr id="16" name="Line 16"/>
           <p:cNvSpPr/>
           <p:nvPr/>
         </p:nvSpPr>
@@ -1943,7 +2998,7 @@
       </p:sp>
       <p:sp>
         <p:nvSpPr>
-          <p:cNvPr id="10" name="TextBox 10"/>
+          <p:cNvPr id="17" name="TextBox 17"/>
           <p:cNvSpPr txBox="1"/>
           <p:nvPr/>
         </p:nvSpPr>
@@ -1983,7 +3038,7 @@
       </p:sp>
       <p:sp>
         <p:nvSpPr>
-          <p:cNvPr id="11" name="TextBox 11"/>
+          <p:cNvPr id="18" name="TextBox 18"/>
           <p:cNvSpPr txBox="1"/>
           <p:nvPr/>
         </p:nvSpPr>
@@ -2023,7 +3078,7 @@
       </p:sp>
       <p:sp>
         <p:nvSpPr>
-          <p:cNvPr id="12" name="Line 12"/>
+          <p:cNvPr id="19" name="Line 19"/>
           <p:cNvSpPr/>
           <p:nvPr/>
         </p:nvSpPr>
@@ -2059,7 +3114,7 @@
       </p:sp>
       <p:sp>
         <p:nvSpPr>
-          <p:cNvPr id="13" name="TextBox 13"/>
+          <p:cNvPr id="20" name="TextBox 20"/>
           <p:cNvSpPr txBox="1"/>
           <p:nvPr/>
         </p:nvSpPr>
@@ -2099,7 +3154,7 @@
       </p:sp>
       <p:sp>
         <p:nvSpPr>
-          <p:cNvPr id="14" name="TextBox 14"/>
+          <p:cNvPr id="21" name="TextBox 21"/>
           <p:cNvSpPr txBox="1"/>
           <p:nvPr/>
         </p:nvSpPr>
@@ -2139,7 +3194,7 @@
       </p:sp>
       <p:sp>
         <p:nvSpPr>
-          <p:cNvPr id="15" name="Line 15"/>
+          <p:cNvPr id="22" name="Line 22"/>
           <p:cNvSpPr/>
           <p:nvPr/>
         </p:nvSpPr>
@@ -2175,7 +3230,7 @@
       </p:sp>
       <p:sp>
         <p:nvSpPr>
-          <p:cNvPr id="16" name="TextBox 16"/>
+          <p:cNvPr id="23" name="TextBox 23"/>
           <p:cNvSpPr txBox="1"/>
           <p:nvPr/>
         </p:nvSpPr>
@@ -2215,7 +3270,7 @@
       </p:sp>
       <p:sp>
         <p:nvSpPr>
-          <p:cNvPr id="17" name="TextBox 17"/>
+          <p:cNvPr id="24" name="TextBox 24"/>
           <p:cNvSpPr txBox="1"/>
           <p:nvPr/>
         </p:nvSpPr>
@@ -2255,7 +3310,7 @@
       </p:sp>
       <p:sp>
         <p:nvSpPr>
-          <p:cNvPr id="18" name="Line 18"/>
+          <p:cNvPr id="25" name="Line 25"/>
           <p:cNvSpPr/>
           <p:nvPr/>
         </p:nvSpPr>
@@ -2291,7 +3346,7 @@
       </p:sp>
       <p:sp>
         <p:nvSpPr>
-          <p:cNvPr id="19" name="TextBox 19"/>
+          <p:cNvPr id="26" name="TextBox 26"/>
           <p:cNvSpPr txBox="1"/>
           <p:nvPr/>
         </p:nvSpPr>
@@ -2331,7 +3386,7 @@
       </p:sp>
       <p:sp>
         <p:nvSpPr>
-          <p:cNvPr id="20" name="TextBox 20"/>
+          <p:cNvPr id="27" name="TextBox 27"/>
           <p:cNvSpPr txBox="1"/>
           <p:nvPr/>
         </p:nvSpPr>
@@ -2451,13 +3506,63 @@
       </p:sp>
       <p:sp>
         <p:nvSpPr>
-          <p:cNvPr id="4" name="TextBox 4"/>
-          <p:cNvSpPr txBox="1"/>
-          <p:nvPr/>
-        </p:nvSpPr>
-        <p:spPr>
-          <a:xfrm>
-            <a:off x="805701" y="2976515"/>
+          <p:cNvPr id="4" name="Freeform 4"/>
+          <p:cNvSpPr/>
+          <p:nvPr/>
+        </p:nvSpPr>
+        <p:spPr>
+          <a:xfrm>
+            <a:off x="723900" y="3104198"/>
+            <a:ext cx="233362" cy="374333"/>
+          </a:xfrm>
+          <a:custGeom>
+            <a:avLst/>
+            <a:gdLst/>
+            <a:ahLst/>
+            <a:cxnLst/>
+            <a:rect l="l" t="t" r="r" b="b"/>
+            <a:pathLst>
+              <a:path w="233362" h="374333">
+                <a:moveTo>
+                  <a:pt x="0" y="0"/>
+                </a:moveTo>
+                <a:lnTo>
+                  <a:pt x="233362" y="0"/>
+                </a:lnTo>
+                <a:lnTo>
+                  <a:pt x="233362" y="374333"/>
+                </a:lnTo>
+                <a:lnTo>
+                  <a:pt x="117157" y="280988"/>
+                </a:lnTo>
+                <a:lnTo>
+                  <a:pt x="0" y="374333"/>
+                </a:lnTo>
+                <a:lnTo>
+                  <a:pt x="0" y="0"/>
+                </a:lnTo>
+                <a:close/>
+              </a:path>
+            </a:pathLst>
+          </a:custGeom>
+          <a:noFill/>
+          <a:ln w="35242" cap="rnd">
+            <a:solidFill>
+              <a:schemeClr val="accent1"/>
+            </a:solidFill>
+            <a:round/>
+          </a:ln>
+        </p:spPr>
+      </p:sp>
+      <p:sp>
+        <p:nvSpPr>
+          <p:cNvPr id="5" name="TextBox 5"/>
+          <p:cNvSpPr txBox="1"/>
+          <p:nvPr/>
+        </p:nvSpPr>
+        <p:spPr>
+          <a:xfrm>
+            <a:off x="1537221" y="2976515"/>
             <a:ext cx="2627815" cy="664483"/>
           </a:xfrm>
           <a:prstGeom prst="rect">
@@ -2491,13 +3596,13 @@
       </p:sp>
       <p:sp>
         <p:nvSpPr>
-          <p:cNvPr id="5" name="TextBox 5"/>
-          <p:cNvSpPr txBox="1"/>
-          <p:nvPr/>
-        </p:nvSpPr>
-        <p:spPr>
-          <a:xfrm>
-            <a:off x="815835" y="3933873"/>
+          <p:cNvPr id="6" name="TextBox 6"/>
+          <p:cNvSpPr txBox="1"/>
+          <p:nvPr/>
+        </p:nvSpPr>
+        <p:spPr>
+          <a:xfrm>
+            <a:off x="1547355" y="3933873"/>
             <a:ext cx="1713490" cy="274301"/>
           </a:xfrm>
           <a:prstGeom prst="rect">
@@ -2565,15 +3670,462 @@
           <a:chExt cx="0" cy="0"/>
         </a:xfrm>
       </p:grpSpPr>
-      <p:sp>
-        <p:nvSpPr>
-          <p:cNvPr id="2" name="TextBox 2"/>
-          <p:cNvSpPr txBox="1"/>
-          <p:nvPr/>
-        </p:nvSpPr>
-        <p:spPr>
-          <a:xfrm>
-            <a:off x="534429" y="369522"/>
+      <p:grpSp>
+        <p:nvGrpSpPr>
+          <p:cNvPr id="8" name="Group 8"/>
+          <p:cNvGrpSpPr/>
+          <p:nvPr/>
+        </p:nvGrpSpPr>
+        <p:grpSpPr>
+          <a:xfrm>
+            <a:off x="605790" y="476250"/>
+            <a:ext cx="213360" cy="170497"/>
+            <a:chOff x="605790" y="476250"/>
+            <a:chExt cx="213360" cy="170497"/>
+          </a:xfrm>
+        </p:grpSpPr>
+        <p:sp>
+          <p:nvSpPr>
+            <p:cNvPr id="2" name="Freeform 2"/>
+            <p:cNvSpPr/>
+            <p:nvPr/>
+          </p:nvSpPr>
+          <p:spPr>
+            <a:xfrm>
+              <a:off x="655320" y="490538"/>
+              <a:ext cx="163830" cy="9525"/>
+            </a:xfrm>
+            <a:custGeom>
+              <a:avLst/>
+              <a:gdLst/>
+              <a:ahLst/>
+              <a:cxnLst/>
+              <a:rect l="l" t="t" r="r" b="b"/>
+              <a:pathLst>
+                <a:path w="163830" h="9525">
+                  <a:moveTo>
+                    <a:pt x="0" y="0"/>
+                  </a:moveTo>
+                  <a:lnTo>
+                    <a:pt x="163830" y="0"/>
+                  </a:lnTo>
+                </a:path>
+              </a:pathLst>
+            </a:custGeom>
+            <a:noFill/>
+            <a:ln w="20955" cap="rnd">
+              <a:solidFill>
+                <a:schemeClr val="accent1"/>
+              </a:solidFill>
+              <a:round/>
+            </a:ln>
+          </p:spPr>
+        </p:sp>
+        <p:sp>
+          <p:nvSpPr>
+            <p:cNvPr id="3" name="Freeform 3"/>
+            <p:cNvSpPr/>
+            <p:nvPr/>
+          </p:nvSpPr>
+          <p:spPr>
+            <a:xfrm>
+              <a:off x="655320" y="561975"/>
+              <a:ext cx="163830" cy="9525"/>
+            </a:xfrm>
+            <a:custGeom>
+              <a:avLst/>
+              <a:gdLst/>
+              <a:ahLst/>
+              <a:cxnLst/>
+              <a:rect l="l" t="t" r="r" b="b"/>
+              <a:pathLst>
+                <a:path w="163830" h="9525">
+                  <a:moveTo>
+                    <a:pt x="0" y="0"/>
+                  </a:moveTo>
+                  <a:lnTo>
+                    <a:pt x="163830" y="0"/>
+                  </a:lnTo>
+                </a:path>
+              </a:pathLst>
+            </a:custGeom>
+            <a:noFill/>
+            <a:ln w="20955" cap="rnd">
+              <a:solidFill>
+                <a:schemeClr val="accent1"/>
+              </a:solidFill>
+              <a:round/>
+            </a:ln>
+          </p:spPr>
+        </p:sp>
+        <p:sp>
+          <p:nvSpPr>
+            <p:cNvPr id="4" name="Freeform 4"/>
+            <p:cNvSpPr/>
+            <p:nvPr/>
+          </p:nvSpPr>
+          <p:spPr>
+            <a:xfrm>
+              <a:off x="655320" y="632460"/>
+              <a:ext cx="163830" cy="9525"/>
+            </a:xfrm>
+            <a:custGeom>
+              <a:avLst/>
+              <a:gdLst/>
+              <a:ahLst/>
+              <a:cxnLst/>
+              <a:rect l="l" t="t" r="r" b="b"/>
+              <a:pathLst>
+                <a:path w="163830" h="9525">
+                  <a:moveTo>
+                    <a:pt x="0" y="0"/>
+                  </a:moveTo>
+                  <a:lnTo>
+                    <a:pt x="163830" y="0"/>
+                  </a:lnTo>
+                </a:path>
+              </a:pathLst>
+            </a:custGeom>
+            <a:noFill/>
+            <a:ln w="20955" cap="rnd">
+              <a:solidFill>
+                <a:schemeClr val="accent1"/>
+              </a:solidFill>
+              <a:round/>
+            </a:ln>
+          </p:spPr>
+        </p:sp>
+        <p:sp>
+          <p:nvSpPr>
+            <p:cNvPr id="5" name="Freeform 5"/>
+            <p:cNvSpPr/>
+            <p:nvPr/>
+          </p:nvSpPr>
+          <p:spPr>
+            <a:xfrm>
+              <a:off x="605790" y="476250"/>
+              <a:ext cx="28575" cy="28575"/>
+            </a:xfrm>
+            <a:custGeom>
+              <a:avLst/>
+              <a:gdLst/>
+              <a:ahLst/>
+              <a:cxnLst/>
+              <a:rect l="l" t="t" r="r" b="b"/>
+              <a:pathLst>
+                <a:path w="28575" h="28575">
+                  <a:moveTo>
+                    <a:pt x="28575" y="14288"/>
+                  </a:moveTo>
+                  <a:lnTo>
+                    <a:pt x="27622" y="18097"/>
+                  </a:lnTo>
+                  <a:lnTo>
+                    <a:pt x="26670" y="20955"/>
+                  </a:lnTo>
+                  <a:lnTo>
+                    <a:pt x="23812" y="24765"/>
+                  </a:lnTo>
+                  <a:lnTo>
+                    <a:pt x="20955" y="26670"/>
+                  </a:lnTo>
+                  <a:lnTo>
+                    <a:pt x="18097" y="27622"/>
+                  </a:lnTo>
+                  <a:lnTo>
+                    <a:pt x="14287" y="28575"/>
+                  </a:lnTo>
+                  <a:lnTo>
+                    <a:pt x="10478" y="27622"/>
+                  </a:lnTo>
+                  <a:lnTo>
+                    <a:pt x="6667" y="26670"/>
+                  </a:lnTo>
+                  <a:lnTo>
+                    <a:pt x="3810" y="24765"/>
+                  </a:lnTo>
+                  <a:lnTo>
+                    <a:pt x="1905" y="20955"/>
+                  </a:lnTo>
+                  <a:lnTo>
+                    <a:pt x="0" y="18097"/>
+                  </a:lnTo>
+                  <a:lnTo>
+                    <a:pt x="0" y="14288"/>
+                  </a:lnTo>
+                  <a:lnTo>
+                    <a:pt x="0" y="10477"/>
+                  </a:lnTo>
+                  <a:lnTo>
+                    <a:pt x="1905" y="7620"/>
+                  </a:lnTo>
+                  <a:lnTo>
+                    <a:pt x="3810" y="3810"/>
+                  </a:lnTo>
+                  <a:lnTo>
+                    <a:pt x="6667" y="1905"/>
+                  </a:lnTo>
+                  <a:lnTo>
+                    <a:pt x="10478" y="952"/>
+                  </a:lnTo>
+                  <a:lnTo>
+                    <a:pt x="14287" y="0"/>
+                  </a:lnTo>
+                  <a:lnTo>
+                    <a:pt x="18097" y="952"/>
+                  </a:lnTo>
+                  <a:lnTo>
+                    <a:pt x="20955" y="1905"/>
+                  </a:lnTo>
+                  <a:lnTo>
+                    <a:pt x="23812" y="3810"/>
+                  </a:lnTo>
+                  <a:lnTo>
+                    <a:pt x="26670" y="7620"/>
+                  </a:lnTo>
+                  <a:lnTo>
+                    <a:pt x="27622" y="10477"/>
+                  </a:lnTo>
+                  <a:lnTo>
+                    <a:pt x="28575" y="14288"/>
+                  </a:lnTo>
+                  <a:close/>
+                </a:path>
+              </a:pathLst>
+            </a:custGeom>
+            <a:noFill/>
+            <a:ln w="20955" cap="rnd">
+              <a:solidFill>
+                <a:schemeClr val="accent1"/>
+              </a:solidFill>
+              <a:round/>
+            </a:ln>
+          </p:spPr>
+        </p:sp>
+        <p:sp>
+          <p:nvSpPr>
+            <p:cNvPr id="6" name="Freeform 6"/>
+            <p:cNvSpPr/>
+            <p:nvPr/>
+          </p:nvSpPr>
+          <p:spPr>
+            <a:xfrm>
+              <a:off x="605790" y="547688"/>
+              <a:ext cx="28575" cy="28575"/>
+            </a:xfrm>
+            <a:custGeom>
+              <a:avLst/>
+              <a:gdLst/>
+              <a:ahLst/>
+              <a:cxnLst/>
+              <a:rect l="l" t="t" r="r" b="b"/>
+              <a:pathLst>
+                <a:path w="28575" h="28575">
+                  <a:moveTo>
+                    <a:pt x="28575" y="14288"/>
+                  </a:moveTo>
+                  <a:lnTo>
+                    <a:pt x="27622" y="18097"/>
+                  </a:lnTo>
+                  <a:lnTo>
+                    <a:pt x="26670" y="20955"/>
+                  </a:lnTo>
+                  <a:lnTo>
+                    <a:pt x="23812" y="23812"/>
+                  </a:lnTo>
+                  <a:lnTo>
+                    <a:pt x="20955" y="26670"/>
+                  </a:lnTo>
+                  <a:lnTo>
+                    <a:pt x="18097" y="27622"/>
+                  </a:lnTo>
+                  <a:lnTo>
+                    <a:pt x="14287" y="28575"/>
+                  </a:lnTo>
+                  <a:lnTo>
+                    <a:pt x="10478" y="27622"/>
+                  </a:lnTo>
+                  <a:lnTo>
+                    <a:pt x="6667" y="26670"/>
+                  </a:lnTo>
+                  <a:lnTo>
+                    <a:pt x="3810" y="23812"/>
+                  </a:lnTo>
+                  <a:lnTo>
+                    <a:pt x="1905" y="20955"/>
+                  </a:lnTo>
+                  <a:lnTo>
+                    <a:pt x="0" y="18097"/>
+                  </a:lnTo>
+                  <a:lnTo>
+                    <a:pt x="0" y="14288"/>
+                  </a:lnTo>
+                  <a:lnTo>
+                    <a:pt x="0" y="10477"/>
+                  </a:lnTo>
+                  <a:lnTo>
+                    <a:pt x="1905" y="6667"/>
+                  </a:lnTo>
+                  <a:lnTo>
+                    <a:pt x="3810" y="3810"/>
+                  </a:lnTo>
+                  <a:lnTo>
+                    <a:pt x="6667" y="1905"/>
+                  </a:lnTo>
+                  <a:lnTo>
+                    <a:pt x="10478" y="0"/>
+                  </a:lnTo>
+                  <a:lnTo>
+                    <a:pt x="14287" y="0"/>
+                  </a:lnTo>
+                  <a:lnTo>
+                    <a:pt x="18097" y="0"/>
+                  </a:lnTo>
+                  <a:lnTo>
+                    <a:pt x="20955" y="1905"/>
+                  </a:lnTo>
+                  <a:lnTo>
+                    <a:pt x="23812" y="3810"/>
+                  </a:lnTo>
+                  <a:lnTo>
+                    <a:pt x="26670" y="6667"/>
+                  </a:lnTo>
+                  <a:lnTo>
+                    <a:pt x="27622" y="10477"/>
+                  </a:lnTo>
+                  <a:lnTo>
+                    <a:pt x="28575" y="14288"/>
+                  </a:lnTo>
+                  <a:close/>
+                </a:path>
+              </a:pathLst>
+            </a:custGeom>
+            <a:noFill/>
+            <a:ln w="20955" cap="rnd">
+              <a:solidFill>
+                <a:schemeClr val="accent1"/>
+              </a:solidFill>
+              <a:round/>
+            </a:ln>
+          </p:spPr>
+        </p:sp>
+        <p:sp>
+          <p:nvSpPr>
+            <p:cNvPr id="7" name="Freeform 7"/>
+            <p:cNvSpPr/>
+            <p:nvPr/>
+          </p:nvSpPr>
+          <p:spPr>
+            <a:xfrm>
+              <a:off x="605790" y="618172"/>
+              <a:ext cx="28575" cy="28575"/>
+            </a:xfrm>
+            <a:custGeom>
+              <a:avLst/>
+              <a:gdLst/>
+              <a:ahLst/>
+              <a:cxnLst/>
+              <a:rect l="l" t="t" r="r" b="b"/>
+              <a:pathLst>
+                <a:path w="28575" h="28575">
+                  <a:moveTo>
+                    <a:pt x="28575" y="14288"/>
+                  </a:moveTo>
+                  <a:lnTo>
+                    <a:pt x="27622" y="18097"/>
+                  </a:lnTo>
+                  <a:lnTo>
+                    <a:pt x="26670" y="21907"/>
+                  </a:lnTo>
+                  <a:lnTo>
+                    <a:pt x="23812" y="24765"/>
+                  </a:lnTo>
+                  <a:lnTo>
+                    <a:pt x="20955" y="26670"/>
+                  </a:lnTo>
+                  <a:lnTo>
+                    <a:pt x="18097" y="28575"/>
+                  </a:lnTo>
+                  <a:lnTo>
+                    <a:pt x="14287" y="28575"/>
+                  </a:lnTo>
+                  <a:lnTo>
+                    <a:pt x="10478" y="28575"/>
+                  </a:lnTo>
+                  <a:lnTo>
+                    <a:pt x="6667" y="26670"/>
+                  </a:lnTo>
+                  <a:lnTo>
+                    <a:pt x="3810" y="24765"/>
+                  </a:lnTo>
+                  <a:lnTo>
+                    <a:pt x="1905" y="21907"/>
+                  </a:lnTo>
+                  <a:lnTo>
+                    <a:pt x="0" y="18097"/>
+                  </a:lnTo>
+                  <a:lnTo>
+                    <a:pt x="0" y="14288"/>
+                  </a:lnTo>
+                  <a:lnTo>
+                    <a:pt x="0" y="10477"/>
+                  </a:lnTo>
+                  <a:lnTo>
+                    <a:pt x="1905" y="7620"/>
+                  </a:lnTo>
+                  <a:lnTo>
+                    <a:pt x="3810" y="4762"/>
+                  </a:lnTo>
+                  <a:lnTo>
+                    <a:pt x="6667" y="1905"/>
+                  </a:lnTo>
+                  <a:lnTo>
+                    <a:pt x="10478" y="952"/>
+                  </a:lnTo>
+                  <a:lnTo>
+                    <a:pt x="14287" y="0"/>
+                  </a:lnTo>
+                  <a:lnTo>
+                    <a:pt x="18097" y="952"/>
+                  </a:lnTo>
+                  <a:lnTo>
+                    <a:pt x="20955" y="1905"/>
+                  </a:lnTo>
+                  <a:lnTo>
+                    <a:pt x="23812" y="4762"/>
+                  </a:lnTo>
+                  <a:lnTo>
+                    <a:pt x="26670" y="7620"/>
+                  </a:lnTo>
+                  <a:lnTo>
+                    <a:pt x="27622" y="10477"/>
+                  </a:lnTo>
+                  <a:lnTo>
+                    <a:pt x="28575" y="14288"/>
+                  </a:lnTo>
+                  <a:close/>
+                </a:path>
+              </a:pathLst>
+            </a:custGeom>
+            <a:noFill/>
+            <a:ln w="20955" cap="rnd">
+              <a:solidFill>
+                <a:schemeClr val="accent1"/>
+              </a:solidFill>
+              <a:round/>
+            </a:ln>
+          </p:spPr>
+        </p:sp>
+      </p:grpSp>
+      <p:sp>
+        <p:nvSpPr>
+          <p:cNvPr id="9" name="TextBox 9"/>
+          <p:cNvSpPr txBox="1"/>
+          <p:nvPr/>
+        </p:nvSpPr>
+        <p:spPr>
+          <a:xfrm>
+            <a:off x="1083069" y="369522"/>
             <a:ext cx="2400999" cy="547135"/>
           </a:xfrm>
           <a:prstGeom prst="rect">
@@ -2607,13 +4159,13 @@
       </p:sp>
       <p:sp>
         <p:nvSpPr>
-          <p:cNvPr id="3" name="Rectangle 3"/>
+          <p:cNvPr id="10" name="Rectangle 10"/>
           <p:cNvSpPr/>
           <p:nvPr/>
         </p:nvSpPr>
         <p:spPr>
           <a:xfrm>
-            <a:off x="548640" y="1023938"/>
+            <a:off x="1097280" y="1023938"/>
             <a:ext cx="2011680" cy="38100"/>
           </a:xfrm>
           <a:prstGeom prst="rect">
@@ -2629,7 +4181,7 @@
       </p:sp>
       <p:sp>
         <p:nvSpPr>
-          <p:cNvPr id="4" name="Rectangle 4"/>
+          <p:cNvPr id="11" name="Rectangle 11"/>
           <p:cNvSpPr/>
           <p:nvPr/>
         </p:nvSpPr>
@@ -2651,14 +4203,14 @@
       </p:sp>
       <p:sp>
         <p:nvSpPr>
-          <p:cNvPr id="5" name="TextBox 5"/>
+          <p:cNvPr id="12" name="TextBox 12"/>
           <p:cNvSpPr txBox="1"/>
           <p:nvPr/>
         </p:nvSpPr>
         <p:spPr>
           <a:xfrm>
             <a:off x="1089660" y="1556385"/>
-            <a:ext cx="1711452" cy="293370"/>
+            <a:ext cx="1828067" cy="293370"/>
           </a:xfrm>
           <a:prstGeom prst="rect">
             <a:avLst/>
@@ -2684,14 +4236,14 @@
                 <a:ea typeface="+mn-ea"/>
                 <a:cs typeface="+mn-cs"/>
               </a:rPr>
-              <a:t>企业知识孤岛严重</a:t>
-            </a:r>
-          </a:p>
-        </p:txBody>
-      </p:sp>
-      <p:sp>
-        <p:nvSpPr>
-          <p:cNvPr id="6" name="TextBox 6"/>
+              <a:t>企业知识孤岛严重…</a:t>
+            </a:r>
+          </a:p>
+        </p:txBody>
+      </p:sp>
+      <p:sp>
+        <p:nvSpPr>
+          <p:cNvPr id="13" name="TextBox 13"/>
           <p:cNvSpPr txBox="1"/>
           <p:nvPr/>
         </p:nvSpPr>
@@ -2731,7 +4283,7 @@
       </p:sp>
       <p:sp>
         <p:nvSpPr>
-          <p:cNvPr id="7" name="Rectangle 7"/>
+          <p:cNvPr id="14" name="Rectangle 14"/>
           <p:cNvSpPr/>
           <p:nvPr/>
         </p:nvSpPr>
@@ -2753,14 +4305,14 @@
       </p:sp>
       <p:sp>
         <p:nvSpPr>
-          <p:cNvPr id="8" name="TextBox 8"/>
+          <p:cNvPr id="15" name="TextBox 15"/>
           <p:cNvSpPr txBox="1"/>
           <p:nvPr/>
         </p:nvSpPr>
         <p:spPr>
           <a:xfrm>
             <a:off x="1089660" y="2123122"/>
-            <a:ext cx="1499426" cy="293370"/>
+            <a:ext cx="1616040" cy="293370"/>
           </a:xfrm>
           <a:prstGeom prst="rect">
             <a:avLst/>
@@ -2786,14 +4338,14 @@
                 <a:ea typeface="+mn-ea"/>
                 <a:cs typeface="+mn-cs"/>
               </a:rPr>
-              <a:t>人工流程成本高</a:t>
-            </a:r>
-          </a:p>
-        </p:txBody>
-      </p:sp>
-      <p:sp>
-        <p:nvSpPr>
-          <p:cNvPr id="9" name="TextBox 9"/>
+              <a:t>人工流程成本高…</a:t>
+            </a:r>
+          </a:p>
+        </p:txBody>
+      </p:sp>
+      <p:sp>
+        <p:nvSpPr>
+          <p:cNvPr id="16" name="TextBox 16"/>
           <p:cNvSpPr txBox="1"/>
           <p:nvPr/>
         </p:nvSpPr>
@@ -2833,7 +4385,7 @@
       </p:sp>
       <p:sp>
         <p:nvSpPr>
-          <p:cNvPr id="10" name="Rectangle 10"/>
+          <p:cNvPr id="17" name="Rectangle 17"/>
           <p:cNvSpPr/>
           <p:nvPr/>
         </p:nvSpPr>
@@ -2855,14 +4407,14 @@
       </p:sp>
       <p:sp>
         <p:nvSpPr>
-          <p:cNvPr id="11" name="TextBox 11"/>
+          <p:cNvPr id="18" name="TextBox 18"/>
           <p:cNvSpPr txBox="1"/>
           <p:nvPr/>
         </p:nvSpPr>
         <p:spPr>
           <a:xfrm>
             <a:off x="1089660" y="2689860"/>
-            <a:ext cx="1499426" cy="293370"/>
+            <a:ext cx="1616040" cy="293370"/>
           </a:xfrm>
           <a:prstGeom prst="rect">
             <a:avLst/>
@@ -2888,14 +4440,14 @@
                 <a:ea typeface="+mn-ea"/>
                 <a:cs typeface="+mn-cs"/>
               </a:rPr>
-              <a:t>大模型能力成熟</a:t>
-            </a:r>
-          </a:p>
-        </p:txBody>
-      </p:sp>
-      <p:sp>
-        <p:nvSpPr>
-          <p:cNvPr id="12" name="TextBox 12"/>
+              <a:t>大模型能力成熟…</a:t>
+            </a:r>
+          </a:p>
+        </p:txBody>
+      </p:sp>
+      <p:sp>
+        <p:nvSpPr>
+          <p:cNvPr id="19" name="TextBox 19"/>
           <p:cNvSpPr txBox="1"/>
           <p:nvPr/>
         </p:nvSpPr>
@@ -2935,7 +4487,7 @@
       </p:sp>
       <p:sp>
         <p:nvSpPr>
-          <p:cNvPr id="13" name="TextBox 13"/>
+          <p:cNvPr id="20" name="TextBox 20"/>
           <p:cNvSpPr txBox="1"/>
           <p:nvPr/>
         </p:nvSpPr>
@@ -2975,7 +4527,7 @@
       </p:sp>
       <p:sp>
         <p:nvSpPr>
-          <p:cNvPr id="14" name="TextBox 14"/>
+          <p:cNvPr id="21" name="TextBox 21"/>
           <p:cNvSpPr txBox="1"/>
           <p:nvPr/>
         </p:nvSpPr>
@@ -3049,15 +4601,252 @@
           <a:chExt cx="0" cy="0"/>
         </a:xfrm>
       </p:grpSpPr>
-      <p:sp>
-        <p:nvSpPr>
-          <p:cNvPr id="2" name="TextBox 2"/>
-          <p:cNvSpPr txBox="1"/>
-          <p:nvPr/>
-        </p:nvSpPr>
-        <p:spPr>
-          <a:xfrm>
-            <a:off x="534429" y="369522"/>
+      <p:grpSp>
+        <p:nvGrpSpPr>
+          <p:cNvPr id="8" name="Group 8"/>
+          <p:cNvGrpSpPr/>
+          <p:nvPr/>
+        </p:nvGrpSpPr>
+        <p:grpSpPr>
+          <a:xfrm>
+            <a:off x="620078" y="476250"/>
+            <a:ext cx="215265" cy="180023"/>
+            <a:chOff x="620078" y="476250"/>
+            <a:chExt cx="215265" cy="180023"/>
+          </a:xfrm>
+        </p:grpSpPr>
+        <p:sp>
+          <p:nvSpPr>
+            <p:cNvPr id="2" name="Freeform 2"/>
+            <p:cNvSpPr/>
+            <p:nvPr/>
+          </p:nvSpPr>
+          <p:spPr>
+            <a:xfrm>
+              <a:off x="620078" y="476250"/>
+              <a:ext cx="9525" cy="170498"/>
+            </a:xfrm>
+            <a:custGeom>
+              <a:avLst/>
+              <a:gdLst/>
+              <a:ahLst/>
+              <a:cxnLst/>
+              <a:rect l="l" t="t" r="r" b="b"/>
+              <a:pathLst>
+                <a:path w="9525" h="170498">
+                  <a:moveTo>
+                    <a:pt x="0" y="170498"/>
+                  </a:moveTo>
+                  <a:lnTo>
+                    <a:pt x="0" y="0"/>
+                  </a:lnTo>
+                </a:path>
+              </a:pathLst>
+            </a:custGeom>
+            <a:noFill/>
+            <a:ln w="20955" cap="rnd">
+              <a:solidFill>
+                <a:schemeClr val="accent1"/>
+              </a:solidFill>
+              <a:round/>
+            </a:ln>
+          </p:spPr>
+        </p:sp>
+        <p:sp>
+          <p:nvSpPr>
+            <p:cNvPr id="3" name="Freeform 3"/>
+            <p:cNvSpPr/>
+            <p:nvPr/>
+          </p:nvSpPr>
+          <p:spPr>
+            <a:xfrm>
+              <a:off x="620078" y="646748"/>
+              <a:ext cx="213360" cy="9525"/>
+            </a:xfrm>
+            <a:custGeom>
+              <a:avLst/>
+              <a:gdLst/>
+              <a:ahLst/>
+              <a:cxnLst/>
+              <a:rect l="l" t="t" r="r" b="b"/>
+              <a:pathLst>
+                <a:path w="213360" h="9525">
+                  <a:moveTo>
+                    <a:pt x="0" y="0"/>
+                  </a:moveTo>
+                  <a:lnTo>
+                    <a:pt x="213360" y="0"/>
+                  </a:lnTo>
+                </a:path>
+              </a:pathLst>
+            </a:custGeom>
+            <a:noFill/>
+            <a:ln w="20955" cap="rnd">
+              <a:solidFill>
+                <a:schemeClr val="accent1"/>
+              </a:solidFill>
+              <a:round/>
+            </a:ln>
+          </p:spPr>
+        </p:sp>
+        <p:sp>
+          <p:nvSpPr>
+            <p:cNvPr id="4" name="Freeform 4"/>
+            <p:cNvSpPr/>
+            <p:nvPr/>
+          </p:nvSpPr>
+          <p:spPr>
+            <a:xfrm>
+              <a:off x="655320" y="561975"/>
+              <a:ext cx="9525" cy="84773"/>
+            </a:xfrm>
+            <a:custGeom>
+              <a:avLst/>
+              <a:gdLst/>
+              <a:ahLst/>
+              <a:cxnLst/>
+              <a:rect l="l" t="t" r="r" b="b"/>
+              <a:pathLst>
+                <a:path w="9525" h="84773">
+                  <a:moveTo>
+                    <a:pt x="0" y="84773"/>
+                  </a:moveTo>
+                  <a:lnTo>
+                    <a:pt x="0" y="0"/>
+                  </a:lnTo>
+                </a:path>
+              </a:pathLst>
+            </a:custGeom>
+            <a:noFill/>
+            <a:ln w="20955" cap="rnd">
+              <a:solidFill>
+                <a:schemeClr val="accent1"/>
+              </a:solidFill>
+              <a:round/>
+            </a:ln>
+          </p:spPr>
+        </p:sp>
+        <p:sp>
+          <p:nvSpPr>
+            <p:cNvPr id="5" name="Freeform 5"/>
+            <p:cNvSpPr/>
+            <p:nvPr/>
+          </p:nvSpPr>
+          <p:spPr>
+            <a:xfrm>
+              <a:off x="712470" y="511492"/>
+              <a:ext cx="9525" cy="135255"/>
+            </a:xfrm>
+            <a:custGeom>
+              <a:avLst/>
+              <a:gdLst/>
+              <a:ahLst/>
+              <a:cxnLst/>
+              <a:rect l="l" t="t" r="r" b="b"/>
+              <a:pathLst>
+                <a:path w="9525" h="135255">
+                  <a:moveTo>
+                    <a:pt x="0" y="135255"/>
+                  </a:moveTo>
+                  <a:lnTo>
+                    <a:pt x="0" y="0"/>
+                  </a:lnTo>
+                </a:path>
+              </a:pathLst>
+            </a:custGeom>
+            <a:noFill/>
+            <a:ln w="20955" cap="rnd">
+              <a:solidFill>
+                <a:schemeClr val="accent1"/>
+              </a:solidFill>
+              <a:round/>
+            </a:ln>
+          </p:spPr>
+        </p:sp>
+        <p:sp>
+          <p:nvSpPr>
+            <p:cNvPr id="6" name="Freeform 6"/>
+            <p:cNvSpPr/>
+            <p:nvPr/>
+          </p:nvSpPr>
+          <p:spPr>
+            <a:xfrm>
+              <a:off x="768668" y="582930"/>
+              <a:ext cx="9525" cy="63818"/>
+            </a:xfrm>
+            <a:custGeom>
+              <a:avLst/>
+              <a:gdLst/>
+              <a:ahLst/>
+              <a:cxnLst/>
+              <a:rect l="l" t="t" r="r" b="b"/>
+              <a:pathLst>
+                <a:path w="9525" h="63818">
+                  <a:moveTo>
+                    <a:pt x="0" y="63818"/>
+                  </a:moveTo>
+                  <a:lnTo>
+                    <a:pt x="0" y="0"/>
+                  </a:lnTo>
+                </a:path>
+              </a:pathLst>
+            </a:custGeom>
+            <a:noFill/>
+            <a:ln w="20955" cap="rnd">
+              <a:solidFill>
+                <a:schemeClr val="accent1"/>
+              </a:solidFill>
+              <a:round/>
+            </a:ln>
+          </p:spPr>
+        </p:sp>
+        <p:sp>
+          <p:nvSpPr>
+            <p:cNvPr id="7" name="Freeform 7"/>
+            <p:cNvSpPr/>
+            <p:nvPr/>
+          </p:nvSpPr>
+          <p:spPr>
+            <a:xfrm>
+              <a:off x="825818" y="490538"/>
+              <a:ext cx="9525" cy="156210"/>
+            </a:xfrm>
+            <a:custGeom>
+              <a:avLst/>
+              <a:gdLst/>
+              <a:ahLst/>
+              <a:cxnLst/>
+              <a:rect l="l" t="t" r="r" b="b"/>
+              <a:pathLst>
+                <a:path w="9525" h="156210">
+                  <a:moveTo>
+                    <a:pt x="0" y="156210"/>
+                  </a:moveTo>
+                  <a:lnTo>
+                    <a:pt x="0" y="0"/>
+                  </a:lnTo>
+                </a:path>
+              </a:pathLst>
+            </a:custGeom>
+            <a:noFill/>
+            <a:ln w="20955" cap="rnd">
+              <a:solidFill>
+                <a:schemeClr val="accent1"/>
+              </a:solidFill>
+              <a:round/>
+            </a:ln>
+          </p:spPr>
+        </p:sp>
+      </p:grpSp>
+      <p:sp>
+        <p:nvSpPr>
+          <p:cNvPr id="9" name="TextBox 9"/>
+          <p:cNvSpPr txBox="1"/>
+          <p:nvPr/>
+        </p:nvSpPr>
+        <p:spPr>
+          <a:xfrm>
+            <a:off x="1083069" y="369522"/>
             <a:ext cx="3350030" cy="547135"/>
           </a:xfrm>
           <a:prstGeom prst="rect">
@@ -3091,13 +4880,13 @@
       </p:sp>
       <p:sp>
         <p:nvSpPr>
-          <p:cNvPr id="3" name="Rectangle 3"/>
+          <p:cNvPr id="10" name="Rectangle 10"/>
           <p:cNvSpPr/>
           <p:nvPr/>
         </p:nvSpPr>
         <p:spPr>
           <a:xfrm>
-            <a:off x="548640" y="1023938"/>
+            <a:off x="1097280" y="1023938"/>
             <a:ext cx="2011680" cy="38100"/>
           </a:xfrm>
           <a:prstGeom prst="rect">
@@ -3113,7 +4902,7 @@
       </p:sp>
       <p:sp>
         <p:nvSpPr>
-          <p:cNvPr id="4" name="TextBox 4"/>
+          <p:cNvPr id="11" name="TextBox 11"/>
           <p:cNvSpPr txBox="1"/>
           <p:nvPr/>
         </p:nvSpPr>
@@ -3153,7 +4942,7 @@
       </p:sp>
       <p:sp>
         <p:nvSpPr>
-          <p:cNvPr id="5" name="Rectangle 5"/>
+          <p:cNvPr id="12" name="Rectangle 12"/>
           <p:cNvSpPr/>
           <p:nvPr/>
         </p:nvSpPr>
@@ -3177,7 +4966,7 @@
       </p:sp>
       <p:sp>
         <p:nvSpPr>
-          <p:cNvPr id="6" name="TextBox 6"/>
+          <p:cNvPr id="13" name="TextBox 13"/>
           <p:cNvSpPr txBox="1"/>
           <p:nvPr/>
         </p:nvSpPr>
@@ -3217,7 +5006,7 @@
       </p:sp>
       <p:sp>
         <p:nvSpPr>
-          <p:cNvPr id="7" name="TextBox 7"/>
+          <p:cNvPr id="14" name="TextBox 14"/>
           <p:cNvSpPr txBox="1"/>
           <p:nvPr/>
         </p:nvSpPr>
@@ -3257,7 +5046,7 @@
       </p:sp>
       <p:sp>
         <p:nvSpPr>
-          <p:cNvPr id="8" name="Rectangle 8"/>
+          <p:cNvPr id="15" name="Rectangle 15"/>
           <p:cNvSpPr/>
           <p:nvPr/>
         </p:nvSpPr>
@@ -3281,7 +5070,7 @@
       </p:sp>
       <p:sp>
         <p:nvSpPr>
-          <p:cNvPr id="9" name="TextBox 9"/>
+          <p:cNvPr id="16" name="TextBox 16"/>
           <p:cNvSpPr txBox="1"/>
           <p:nvPr/>
         </p:nvSpPr>
@@ -3321,7 +5110,7 @@
       </p:sp>
       <p:sp>
         <p:nvSpPr>
-          <p:cNvPr id="10" name="TextBox 10"/>
+          <p:cNvPr id="17" name="TextBox 17"/>
           <p:cNvSpPr txBox="1"/>
           <p:nvPr/>
         </p:nvSpPr>
@@ -3361,7 +5150,7 @@
       </p:sp>
       <p:sp>
         <p:nvSpPr>
-          <p:cNvPr id="11" name="Rectangle 11"/>
+          <p:cNvPr id="18" name="Rectangle 18"/>
           <p:cNvSpPr/>
           <p:nvPr/>
         </p:nvSpPr>
@@ -3385,7 +5174,7 @@
       </p:sp>
       <p:sp>
         <p:nvSpPr>
-          <p:cNvPr id="12" name="TextBox 12"/>
+          <p:cNvPr id="19" name="TextBox 19"/>
           <p:cNvSpPr txBox="1"/>
           <p:nvPr/>
         </p:nvSpPr>
@@ -3425,7 +5214,7 @@
       </p:sp>
       <p:sp>
         <p:nvSpPr>
-          <p:cNvPr id="13" name="TextBox 13"/>
+          <p:cNvPr id="20" name="TextBox 20"/>
           <p:cNvSpPr txBox="1"/>
           <p:nvPr/>
         </p:nvSpPr>
@@ -3465,7 +5254,7 @@
       </p:sp>
       <p:sp>
         <p:nvSpPr>
-          <p:cNvPr id="14" name="Rectangle 14"/>
+          <p:cNvPr id="21" name="Rectangle 21"/>
           <p:cNvSpPr/>
           <p:nvPr/>
         </p:nvSpPr>
@@ -3489,7 +5278,7 @@
       </p:sp>
       <p:sp>
         <p:nvSpPr>
-          <p:cNvPr id="15" name="TextBox 15"/>
+          <p:cNvPr id="22" name="TextBox 22"/>
           <p:cNvSpPr txBox="1"/>
           <p:nvPr/>
         </p:nvSpPr>
@@ -3529,7 +5318,7 @@
       </p:sp>
       <p:sp>
         <p:nvSpPr>
-          <p:cNvPr id="16" name="TextBox 16"/>
+          <p:cNvPr id="23" name="TextBox 23"/>
           <p:cNvSpPr txBox="1"/>
           <p:nvPr/>
         </p:nvSpPr>
@@ -3569,7 +5358,7 @@
       </p:sp>
       <p:sp>
         <p:nvSpPr>
-          <p:cNvPr id="17" name="TextBox 17"/>
+          <p:cNvPr id="24" name="TextBox 24"/>
           <p:cNvSpPr txBox="1"/>
           <p:nvPr/>
         </p:nvSpPr>
@@ -3689,13 +5478,63 @@
       </p:sp>
       <p:sp>
         <p:nvSpPr>
-          <p:cNvPr id="4" name="TextBox 4"/>
-          <p:cNvSpPr txBox="1"/>
-          <p:nvPr/>
-        </p:nvSpPr>
-        <p:spPr>
-          <a:xfrm>
-            <a:off x="805701" y="2976515"/>
+          <p:cNvPr id="4" name="Freeform 4"/>
+          <p:cNvSpPr/>
+          <p:nvPr/>
+        </p:nvSpPr>
+        <p:spPr>
+          <a:xfrm>
+            <a:off x="723900" y="3104198"/>
+            <a:ext cx="233362" cy="374333"/>
+          </a:xfrm>
+          <a:custGeom>
+            <a:avLst/>
+            <a:gdLst/>
+            <a:ahLst/>
+            <a:cxnLst/>
+            <a:rect l="l" t="t" r="r" b="b"/>
+            <a:pathLst>
+              <a:path w="233362" h="374333">
+                <a:moveTo>
+                  <a:pt x="0" y="0"/>
+                </a:moveTo>
+                <a:lnTo>
+                  <a:pt x="233362" y="0"/>
+                </a:lnTo>
+                <a:lnTo>
+                  <a:pt x="233362" y="374333"/>
+                </a:lnTo>
+                <a:lnTo>
+                  <a:pt x="117157" y="280988"/>
+                </a:lnTo>
+                <a:lnTo>
+                  <a:pt x="0" y="374333"/>
+                </a:lnTo>
+                <a:lnTo>
+                  <a:pt x="0" y="0"/>
+                </a:lnTo>
+                <a:close/>
+              </a:path>
+            </a:pathLst>
+          </a:custGeom>
+          <a:noFill/>
+          <a:ln w="35242" cap="rnd">
+            <a:solidFill>
+              <a:schemeClr val="accent1"/>
+            </a:solidFill>
+            <a:round/>
+          </a:ln>
+        </p:spPr>
+      </p:sp>
+      <p:sp>
+        <p:nvSpPr>
+          <p:cNvPr id="5" name="TextBox 5"/>
+          <p:cNvSpPr txBox="1"/>
+          <p:nvPr/>
+        </p:nvSpPr>
+        <p:spPr>
+          <a:xfrm>
+            <a:off x="1537221" y="2976515"/>
             <a:ext cx="2627815" cy="664483"/>
           </a:xfrm>
           <a:prstGeom prst="rect">
@@ -3729,13 +5568,13 @@
       </p:sp>
       <p:sp>
         <p:nvSpPr>
-          <p:cNvPr id="5" name="TextBox 5"/>
-          <p:cNvSpPr txBox="1"/>
-          <p:nvPr/>
-        </p:nvSpPr>
-        <p:spPr>
-          <a:xfrm>
-            <a:off x="815835" y="3933873"/>
+          <p:cNvPr id="6" name="TextBox 6"/>
+          <p:cNvSpPr txBox="1"/>
+          <p:nvPr/>
+        </p:nvSpPr>
+        <p:spPr>
+          <a:xfrm>
+            <a:off x="1547355" y="3933873"/>
             <a:ext cx="1335881" cy="274301"/>
           </a:xfrm>
           <a:prstGeom prst="rect">
@@ -3803,15 +5642,124 @@
           <a:chExt cx="0" cy="0"/>
         </a:xfrm>
       </p:grpSpPr>
-      <p:sp>
-        <p:nvSpPr>
-          <p:cNvPr id="2" name="TextBox 2"/>
-          <p:cNvSpPr txBox="1"/>
-          <p:nvPr/>
-        </p:nvSpPr>
-        <p:spPr>
-          <a:xfrm>
-            <a:off x="534429" y="369522"/>
+      <p:grpSp>
+        <p:nvGrpSpPr>
+          <p:cNvPr id="4" name="Group 4"/>
+          <p:cNvGrpSpPr/>
+          <p:nvPr/>
+        </p:nvGrpSpPr>
+        <p:grpSpPr>
+          <a:xfrm>
+            <a:off x="634365" y="469582"/>
+            <a:ext cx="184785" cy="184785"/>
+            <a:chOff x="634365" y="469582"/>
+            <a:chExt cx="184785" cy="184785"/>
+          </a:xfrm>
+        </p:grpSpPr>
+        <p:sp>
+          <p:nvSpPr>
+            <p:cNvPr id="2" name="Freeform 2"/>
+            <p:cNvSpPr/>
+            <p:nvPr/>
+          </p:nvSpPr>
+          <p:spPr>
+            <a:xfrm>
+              <a:off x="634365" y="469582"/>
+              <a:ext cx="78105" cy="184785"/>
+            </a:xfrm>
+            <a:custGeom>
+              <a:avLst/>
+              <a:gdLst/>
+              <a:ahLst/>
+              <a:cxnLst/>
+              <a:rect l="l" t="t" r="r" b="b"/>
+              <a:pathLst>
+                <a:path w="78105" h="184785">
+                  <a:moveTo>
+                    <a:pt x="0" y="0"/>
+                  </a:moveTo>
+                  <a:lnTo>
+                    <a:pt x="78105" y="0"/>
+                  </a:lnTo>
+                  <a:lnTo>
+                    <a:pt x="78105" y="184785"/>
+                  </a:lnTo>
+                  <a:lnTo>
+                    <a:pt x="0" y="184785"/>
+                  </a:lnTo>
+                  <a:lnTo>
+                    <a:pt x="0" y="0"/>
+                  </a:lnTo>
+                  <a:close/>
+                </a:path>
+              </a:pathLst>
+            </a:custGeom>
+            <a:noFill/>
+            <a:ln w="20955" cap="rnd">
+              <a:solidFill>
+                <a:schemeClr val="accent1"/>
+              </a:solidFill>
+              <a:round/>
+            </a:ln>
+          </p:spPr>
+        </p:sp>
+        <p:sp>
+          <p:nvSpPr>
+            <p:cNvPr id="3" name="Freeform 3"/>
+            <p:cNvSpPr/>
+            <p:nvPr/>
+          </p:nvSpPr>
+          <p:spPr>
+            <a:xfrm>
+              <a:off x="741045" y="469582"/>
+              <a:ext cx="78105" cy="184785"/>
+            </a:xfrm>
+            <a:custGeom>
+              <a:avLst/>
+              <a:gdLst/>
+              <a:ahLst/>
+              <a:cxnLst/>
+              <a:rect l="l" t="t" r="r" b="b"/>
+              <a:pathLst>
+                <a:path w="78105" h="184785">
+                  <a:moveTo>
+                    <a:pt x="0" y="0"/>
+                  </a:moveTo>
+                  <a:lnTo>
+                    <a:pt x="78105" y="0"/>
+                  </a:lnTo>
+                  <a:lnTo>
+                    <a:pt x="78105" y="184785"/>
+                  </a:lnTo>
+                  <a:lnTo>
+                    <a:pt x="0" y="184785"/>
+                  </a:lnTo>
+                  <a:lnTo>
+                    <a:pt x="0" y="0"/>
+                  </a:lnTo>
+                  <a:close/>
+                </a:path>
+              </a:pathLst>
+            </a:custGeom>
+            <a:noFill/>
+            <a:ln w="20955" cap="rnd">
+              <a:solidFill>
+                <a:schemeClr val="accent1"/>
+              </a:solidFill>
+              <a:round/>
+            </a:ln>
+          </p:spPr>
+        </p:sp>
+      </p:grpSp>
+      <p:sp>
+        <p:nvSpPr>
+          <p:cNvPr id="5" name="TextBox 5"/>
+          <p:cNvSpPr txBox="1"/>
+          <p:nvPr/>
+        </p:nvSpPr>
+        <p:spPr>
+          <a:xfrm>
+            <a:off x="1083069" y="369522"/>
             <a:ext cx="1610140" cy="547135"/>
           </a:xfrm>
           <a:prstGeom prst="rect">
@@ -3845,13 +5793,13 @@
       </p:sp>
       <p:sp>
         <p:nvSpPr>
-          <p:cNvPr id="3" name="Rectangle 3"/>
+          <p:cNvPr id="6" name="Rectangle 6"/>
           <p:cNvSpPr/>
           <p:nvPr/>
         </p:nvSpPr>
         <p:spPr>
           <a:xfrm>
-            <a:off x="548640" y="1023938"/>
+            <a:off x="1097280" y="1023938"/>
             <a:ext cx="2011680" cy="38100"/>
           </a:xfrm>
           <a:prstGeom prst="rect">
@@ -3867,7 +5815,7 @@
       </p:sp>
       <p:sp>
         <p:nvSpPr>
-          <p:cNvPr id="4" name="Rectangle 4"/>
+          <p:cNvPr id="7" name="Rectangle 7"/>
           <p:cNvSpPr/>
           <p:nvPr/>
         </p:nvSpPr>
@@ -3889,7 +5837,7 @@
       </p:sp>
       <p:sp>
         <p:nvSpPr>
-          <p:cNvPr id="5" name="Rectangle 5"/>
+          <p:cNvPr id="8" name="Rectangle 8"/>
           <p:cNvSpPr/>
           <p:nvPr/>
         </p:nvSpPr>
@@ -3911,7 +5859,7 @@
       </p:sp>
       <p:sp>
         <p:nvSpPr>
-          <p:cNvPr id="6" name="TextBox 6"/>
+          <p:cNvPr id="9" name="TextBox 9"/>
           <p:cNvSpPr txBox="1"/>
           <p:nvPr/>
         </p:nvSpPr>
@@ -3951,7 +5899,7 @@
       </p:sp>
       <p:sp>
         <p:nvSpPr>
-          <p:cNvPr id="7" name="TextBox 7"/>
+          <p:cNvPr id="10" name="TextBox 10"/>
           <p:cNvSpPr txBox="1"/>
           <p:nvPr/>
         </p:nvSpPr>
@@ -3991,7 +5939,7 @@
       </p:sp>
       <p:sp>
         <p:nvSpPr>
-          <p:cNvPr id="8" name="Rectangle 8"/>
+          <p:cNvPr id="11" name="Rectangle 11"/>
           <p:cNvSpPr/>
           <p:nvPr/>
         </p:nvSpPr>
@@ -4013,7 +5961,7 @@
       </p:sp>
       <p:sp>
         <p:nvSpPr>
-          <p:cNvPr id="9" name="TextBox 9"/>
+          <p:cNvPr id="12" name="TextBox 12"/>
           <p:cNvSpPr txBox="1"/>
           <p:nvPr/>
         </p:nvSpPr>
@@ -4053,7 +6001,7 @@
       </p:sp>
       <p:sp>
         <p:nvSpPr>
-          <p:cNvPr id="10" name="Rectangle 10"/>
+          <p:cNvPr id="13" name="Rectangle 13"/>
           <p:cNvSpPr/>
           <p:nvPr/>
         </p:nvSpPr>
@@ -4075,7 +6023,7 @@
       </p:sp>
       <p:sp>
         <p:nvSpPr>
-          <p:cNvPr id="11" name="TextBox 11"/>
+          <p:cNvPr id="14" name="TextBox 14"/>
           <p:cNvSpPr txBox="1"/>
           <p:nvPr/>
         </p:nvSpPr>
@@ -4115,7 +6063,7 @@
       </p:sp>
       <p:sp>
         <p:nvSpPr>
-          <p:cNvPr id="12" name="Rectangle 12"/>
+          <p:cNvPr id="15" name="Rectangle 15"/>
           <p:cNvSpPr/>
           <p:nvPr/>
         </p:nvSpPr>
@@ -4137,7 +6085,7 @@
       </p:sp>
       <p:sp>
         <p:nvSpPr>
-          <p:cNvPr id="13" name="TextBox 13"/>
+          <p:cNvPr id="16" name="TextBox 16"/>
           <p:cNvSpPr txBox="1"/>
           <p:nvPr/>
         </p:nvSpPr>
@@ -4177,7 +6125,7 @@
       </p:sp>
       <p:sp>
         <p:nvSpPr>
-          <p:cNvPr id="14" name="Rectangle 14"/>
+          <p:cNvPr id="17" name="Rectangle 17"/>
           <p:cNvSpPr/>
           <p:nvPr/>
         </p:nvSpPr>
@@ -4199,7 +6147,7 @@
       </p:sp>
       <p:sp>
         <p:nvSpPr>
-          <p:cNvPr id="15" name="TextBox 15"/>
+          <p:cNvPr id="18" name="TextBox 18"/>
           <p:cNvSpPr txBox="1"/>
           <p:nvPr/>
         </p:nvSpPr>
@@ -4239,7 +6187,7 @@
       </p:sp>
       <p:sp>
         <p:nvSpPr>
-          <p:cNvPr id="16" name="Rectangle 16"/>
+          <p:cNvPr id="19" name="Rectangle 19"/>
           <p:cNvSpPr/>
           <p:nvPr/>
         </p:nvSpPr>
@@ -4261,7 +6209,7 @@
       </p:sp>
       <p:sp>
         <p:nvSpPr>
-          <p:cNvPr id="17" name="TextBox 17"/>
+          <p:cNvPr id="20" name="TextBox 20"/>
           <p:cNvSpPr txBox="1"/>
           <p:nvPr/>
         </p:nvSpPr>
@@ -4301,7 +6249,7 @@
       </p:sp>
       <p:sp>
         <p:nvSpPr>
-          <p:cNvPr id="18" name="Rectangle 18"/>
+          <p:cNvPr id="21" name="Rectangle 21"/>
           <p:cNvSpPr/>
           <p:nvPr/>
         </p:nvSpPr>
@@ -4323,7 +6271,7 @@
       </p:sp>
       <p:sp>
         <p:nvSpPr>
-          <p:cNvPr id="19" name="TextBox 19"/>
+          <p:cNvPr id="22" name="TextBox 22"/>
           <p:cNvSpPr txBox="1"/>
           <p:nvPr/>
         </p:nvSpPr>
@@ -4363,7 +6311,7 @@
       </p:sp>
       <p:sp>
         <p:nvSpPr>
-          <p:cNvPr id="20" name="Rectangle 20"/>
+          <p:cNvPr id="23" name="Rectangle 23"/>
           <p:cNvSpPr/>
           <p:nvPr/>
         </p:nvSpPr>
@@ -4385,7 +6333,7 @@
       </p:sp>
       <p:sp>
         <p:nvSpPr>
-          <p:cNvPr id="21" name="TextBox 21"/>
+          <p:cNvPr id="24" name="TextBox 24"/>
           <p:cNvSpPr txBox="1"/>
           <p:nvPr/>
         </p:nvSpPr>
@@ -4425,7 +6373,7 @@
       </p:sp>
       <p:sp>
         <p:nvSpPr>
-          <p:cNvPr id="22" name="Rectangle 22"/>
+          <p:cNvPr id="25" name="Rectangle 25"/>
           <p:cNvSpPr/>
           <p:nvPr/>
         </p:nvSpPr>
@@ -4447,7 +6395,7 @@
       </p:sp>
       <p:sp>
         <p:nvSpPr>
-          <p:cNvPr id="23" name="TextBox 23"/>
+          <p:cNvPr id="26" name="TextBox 26"/>
           <p:cNvSpPr txBox="1"/>
           <p:nvPr/>
         </p:nvSpPr>
@@ -4487,7 +6435,7 @@
       </p:sp>
       <p:sp>
         <p:nvSpPr>
-          <p:cNvPr id="24" name="TextBox 24"/>
+          <p:cNvPr id="27" name="TextBox 27"/>
           <p:cNvSpPr txBox="1"/>
           <p:nvPr/>
         </p:nvSpPr>
@@ -4527,7 +6475,7 @@
       </p:sp>
       <p:sp>
         <p:nvSpPr>
-          <p:cNvPr id="25" name="TextBox 25"/>
+          <p:cNvPr id="28" name="TextBox 28"/>
           <p:cNvSpPr txBox="1"/>
           <p:nvPr/>
         </p:nvSpPr>
@@ -4601,15 +6549,211 @@
           <a:chExt cx="0" cy="0"/>
         </a:xfrm>
       </p:grpSpPr>
-      <p:sp>
-        <p:nvSpPr>
-          <p:cNvPr id="2" name="TextBox 2"/>
-          <p:cNvSpPr txBox="1"/>
-          <p:nvPr/>
-        </p:nvSpPr>
-        <p:spPr>
-          <a:xfrm>
-            <a:off x="534429" y="369522"/>
+      <p:grpSp>
+        <p:nvGrpSpPr>
+          <p:cNvPr id="5" name="Group 5"/>
+          <p:cNvGrpSpPr/>
+          <p:nvPr/>
+        </p:nvGrpSpPr>
+        <p:grpSpPr>
+          <a:xfrm>
+            <a:off x="605790" y="441008"/>
+            <a:ext cx="241935" cy="241935"/>
+            <a:chOff x="605790" y="441008"/>
+            <a:chExt cx="241935" cy="241935"/>
+          </a:xfrm>
+        </p:grpSpPr>
+        <p:sp>
+          <p:nvSpPr>
+            <p:cNvPr id="2" name="Freeform 2"/>
+            <p:cNvSpPr/>
+            <p:nvPr/>
+          </p:nvSpPr>
+          <p:spPr>
+            <a:xfrm>
+              <a:off x="605790" y="441008"/>
+              <a:ext cx="241935" cy="241935"/>
+            </a:xfrm>
+            <a:custGeom>
+              <a:avLst/>
+              <a:gdLst/>
+              <a:ahLst/>
+              <a:cxnLst/>
+              <a:rect l="l" t="t" r="r" b="b"/>
+              <a:pathLst>
+                <a:path w="241935" h="241935">
+                  <a:moveTo>
+                    <a:pt x="241935" y="120968"/>
+                  </a:moveTo>
+                  <a:lnTo>
+                    <a:pt x="237172" y="152400"/>
+                  </a:lnTo>
+                  <a:lnTo>
+                    <a:pt x="225742" y="180975"/>
+                  </a:lnTo>
+                  <a:lnTo>
+                    <a:pt x="205740" y="205740"/>
+                  </a:lnTo>
+                  <a:lnTo>
+                    <a:pt x="180975" y="225743"/>
+                  </a:lnTo>
+                  <a:lnTo>
+                    <a:pt x="152400" y="237172"/>
+                  </a:lnTo>
+                  <a:lnTo>
+                    <a:pt x="120967" y="241935"/>
+                  </a:lnTo>
+                  <a:lnTo>
+                    <a:pt x="89535" y="237172"/>
+                  </a:lnTo>
+                  <a:lnTo>
+                    <a:pt x="60008" y="225743"/>
+                  </a:lnTo>
+                  <a:lnTo>
+                    <a:pt x="35242" y="205740"/>
+                  </a:lnTo>
+                  <a:lnTo>
+                    <a:pt x="16192" y="180975"/>
+                  </a:lnTo>
+                  <a:lnTo>
+                    <a:pt x="3810" y="152400"/>
+                  </a:lnTo>
+                  <a:lnTo>
+                    <a:pt x="0" y="120968"/>
+                  </a:lnTo>
+                  <a:lnTo>
+                    <a:pt x="3810" y="89535"/>
+                  </a:lnTo>
+                  <a:lnTo>
+                    <a:pt x="16192" y="60007"/>
+                  </a:lnTo>
+                  <a:lnTo>
+                    <a:pt x="35242" y="35243"/>
+                  </a:lnTo>
+                  <a:lnTo>
+                    <a:pt x="60008" y="16193"/>
+                  </a:lnTo>
+                  <a:lnTo>
+                    <a:pt x="89535" y="3810"/>
+                  </a:lnTo>
+                  <a:lnTo>
+                    <a:pt x="120967" y="0"/>
+                  </a:lnTo>
+                  <a:lnTo>
+                    <a:pt x="152400" y="3810"/>
+                  </a:lnTo>
+                  <a:lnTo>
+                    <a:pt x="180975" y="16193"/>
+                  </a:lnTo>
+                  <a:lnTo>
+                    <a:pt x="205740" y="35243"/>
+                  </a:lnTo>
+                  <a:lnTo>
+                    <a:pt x="225742" y="60007"/>
+                  </a:lnTo>
+                  <a:lnTo>
+                    <a:pt x="237172" y="89535"/>
+                  </a:lnTo>
+                  <a:lnTo>
+                    <a:pt x="241935" y="120968"/>
+                  </a:lnTo>
+                  <a:close/>
+                </a:path>
+              </a:pathLst>
+            </a:custGeom>
+            <a:noFill/>
+            <a:ln w="20955" cap="rnd">
+              <a:solidFill>
+                <a:schemeClr val="accent1"/>
+              </a:solidFill>
+              <a:round/>
+            </a:ln>
+          </p:spPr>
+        </p:sp>
+        <p:sp>
+          <p:nvSpPr>
+            <p:cNvPr id="3" name="Freeform 3"/>
+            <p:cNvSpPr/>
+            <p:nvPr/>
+          </p:nvSpPr>
+          <p:spPr>
+            <a:xfrm>
+              <a:off x="726758" y="476250"/>
+              <a:ext cx="9525" cy="85725"/>
+            </a:xfrm>
+            <a:custGeom>
+              <a:avLst/>
+              <a:gdLst/>
+              <a:ahLst/>
+              <a:cxnLst/>
+              <a:rect l="l" t="t" r="r" b="b"/>
+              <a:pathLst>
+                <a:path w="9525" h="85725">
+                  <a:moveTo>
+                    <a:pt x="0" y="85725"/>
+                  </a:moveTo>
+                  <a:lnTo>
+                    <a:pt x="0" y="0"/>
+                  </a:lnTo>
+                </a:path>
+              </a:pathLst>
+            </a:custGeom>
+            <a:noFill/>
+            <a:ln w="20955" cap="rnd">
+              <a:solidFill>
+                <a:schemeClr val="accent1"/>
+              </a:solidFill>
+              <a:round/>
+            </a:ln>
+          </p:spPr>
+        </p:sp>
+        <p:sp>
+          <p:nvSpPr>
+            <p:cNvPr id="4" name="Freeform 4"/>
+            <p:cNvSpPr/>
+            <p:nvPr/>
+          </p:nvSpPr>
+          <p:spPr>
+            <a:xfrm>
+              <a:off x="726758" y="561975"/>
+              <a:ext cx="70485" cy="9525"/>
+            </a:xfrm>
+            <a:custGeom>
+              <a:avLst/>
+              <a:gdLst/>
+              <a:ahLst/>
+              <a:cxnLst/>
+              <a:rect l="l" t="t" r="r" b="b"/>
+              <a:pathLst>
+                <a:path w="70485" h="9525">
+                  <a:moveTo>
+                    <a:pt x="0" y="0"/>
+                  </a:moveTo>
+                  <a:lnTo>
+                    <a:pt x="70485" y="0"/>
+                  </a:lnTo>
+                </a:path>
+              </a:pathLst>
+            </a:custGeom>
+            <a:noFill/>
+            <a:ln w="20955" cap="rnd">
+              <a:solidFill>
+                <a:schemeClr val="accent1"/>
+              </a:solidFill>
+              <a:round/>
+            </a:ln>
+          </p:spPr>
+        </p:sp>
+      </p:grpSp>
+      <p:sp>
+        <p:nvSpPr>
+          <p:cNvPr id="6" name="TextBox 6"/>
+          <p:cNvSpPr txBox="1"/>
+          <p:nvPr/>
+        </p:nvSpPr>
+        <p:spPr>
+          <a:xfrm>
+            <a:off x="1083069" y="369522"/>
             <a:ext cx="1610140" cy="547135"/>
           </a:xfrm>
           <a:prstGeom prst="rect">
@@ -4643,13 +6787,13 @@
       </p:sp>
       <p:sp>
         <p:nvSpPr>
-          <p:cNvPr id="3" name="Rectangle 3"/>
+          <p:cNvPr id="7" name="Rectangle 7"/>
           <p:cNvSpPr/>
           <p:nvPr/>
         </p:nvSpPr>
         <p:spPr>
           <a:xfrm>
-            <a:off x="548640" y="1023938"/>
+            <a:off x="1097280" y="1023938"/>
             <a:ext cx="2011680" cy="38100"/>
           </a:xfrm>
           <a:prstGeom prst="rect">
@@ -4665,7 +6809,7 @@
       </p:sp>
       <p:sp>
         <p:nvSpPr>
-          <p:cNvPr id="4" name="Line 4"/>
+          <p:cNvPr id="8" name="Line 8"/>
           <p:cNvSpPr/>
           <p:nvPr/>
         </p:nvSpPr>
@@ -4701,7 +6845,7 @@
       </p:sp>
       <p:sp>
         <p:nvSpPr>
-          <p:cNvPr id="5" name="Rectangle 5"/>
+          <p:cNvPr id="9" name="Rectangle 9"/>
           <p:cNvSpPr/>
           <p:nvPr/>
         </p:nvSpPr>
@@ -4723,7 +6867,7 @@
       </p:sp>
       <p:sp>
         <p:nvSpPr>
-          <p:cNvPr id="6" name="TextBox 6"/>
+          <p:cNvPr id="10" name="TextBox 10"/>
           <p:cNvSpPr txBox="1"/>
           <p:nvPr/>
         </p:nvSpPr>
@@ -4763,7 +6907,7 @@
       </p:sp>
       <p:sp>
         <p:nvSpPr>
-          <p:cNvPr id="7" name="TextBox 7"/>
+          <p:cNvPr id="11" name="TextBox 11"/>
           <p:cNvSpPr txBox="1"/>
           <p:nvPr/>
         </p:nvSpPr>
@@ -4803,7 +6947,7 @@
       </p:sp>
       <p:sp>
         <p:nvSpPr>
-          <p:cNvPr id="8" name="Rectangle 8"/>
+          <p:cNvPr id="12" name="Rectangle 12"/>
           <p:cNvSpPr/>
           <p:nvPr/>
         </p:nvSpPr>
@@ -4825,7 +6969,7 @@
       </p:sp>
       <p:sp>
         <p:nvSpPr>
-          <p:cNvPr id="9" name="TextBox 9"/>
+          <p:cNvPr id="13" name="TextBox 13"/>
           <p:cNvSpPr txBox="1"/>
           <p:nvPr/>
         </p:nvSpPr>
@@ -4865,7 +7009,7 @@
       </p:sp>
       <p:sp>
         <p:nvSpPr>
-          <p:cNvPr id="10" name="TextBox 10"/>
+          <p:cNvPr id="14" name="TextBox 14"/>
           <p:cNvSpPr txBox="1"/>
           <p:nvPr/>
         </p:nvSpPr>
@@ -4905,7 +7049,7 @@
       </p:sp>
       <p:sp>
         <p:nvSpPr>
-          <p:cNvPr id="11" name="Rectangle 11"/>
+          <p:cNvPr id="15" name="Rectangle 15"/>
           <p:cNvSpPr/>
           <p:nvPr/>
         </p:nvSpPr>
@@ -4927,7 +7071,7 @@
       </p:sp>
       <p:sp>
         <p:nvSpPr>
-          <p:cNvPr id="12" name="TextBox 12"/>
+          <p:cNvPr id="16" name="TextBox 16"/>
           <p:cNvSpPr txBox="1"/>
           <p:nvPr/>
         </p:nvSpPr>
@@ -4967,7 +7111,7 @@
       </p:sp>
       <p:sp>
         <p:nvSpPr>
-          <p:cNvPr id="13" name="TextBox 13"/>
+          <p:cNvPr id="17" name="TextBox 17"/>
           <p:cNvSpPr txBox="1"/>
           <p:nvPr/>
         </p:nvSpPr>
@@ -5007,7 +7151,7 @@
       </p:sp>
       <p:sp>
         <p:nvSpPr>
-          <p:cNvPr id="14" name="Rectangle 14"/>
+          <p:cNvPr id="18" name="Rectangle 18"/>
           <p:cNvSpPr/>
           <p:nvPr/>
         </p:nvSpPr>
@@ -5029,7 +7173,7 @@
       </p:sp>
       <p:sp>
         <p:nvSpPr>
-          <p:cNvPr id="15" name="TextBox 15"/>
+          <p:cNvPr id="19" name="TextBox 19"/>
           <p:cNvSpPr txBox="1"/>
           <p:nvPr/>
         </p:nvSpPr>
@@ -5069,7 +7213,7 @@
       </p:sp>
       <p:sp>
         <p:nvSpPr>
-          <p:cNvPr id="16" name="TextBox 16"/>
+          <p:cNvPr id="20" name="TextBox 20"/>
           <p:cNvSpPr txBox="1"/>
           <p:nvPr/>
         </p:nvSpPr>
@@ -5109,7 +7253,7 @@
       </p:sp>
       <p:sp>
         <p:nvSpPr>
-          <p:cNvPr id="17" name="TextBox 17"/>
+          <p:cNvPr id="21" name="TextBox 21"/>
           <p:cNvSpPr txBox="1"/>
           <p:nvPr/>
         </p:nvSpPr>
@@ -5149,7 +7293,7 @@
       </p:sp>
       <p:sp>
         <p:nvSpPr>
-          <p:cNvPr id="18" name="TextBox 18"/>
+          <p:cNvPr id="22" name="TextBox 22"/>
           <p:cNvSpPr txBox="1"/>
           <p:nvPr/>
         </p:nvSpPr>
@@ -5223,15 +7367,188 @@
           <a:chExt cx="0" cy="0"/>
         </a:xfrm>
       </p:grpSpPr>
-      <p:sp>
-        <p:nvSpPr>
-          <p:cNvPr id="2" name="TextBox 2"/>
-          <p:cNvSpPr txBox="1"/>
-          <p:nvPr/>
-        </p:nvSpPr>
-        <p:spPr>
-          <a:xfrm>
-            <a:off x="534429" y="369522"/>
+      <p:grpSp>
+        <p:nvGrpSpPr>
+          <p:cNvPr id="6" name="Group 6"/>
+          <p:cNvGrpSpPr/>
+          <p:nvPr/>
+        </p:nvGrpSpPr>
+        <p:grpSpPr>
+          <a:xfrm>
+            <a:off x="620078" y="483870"/>
+            <a:ext cx="213360" cy="156210"/>
+            <a:chOff x="620078" y="483870"/>
+            <a:chExt cx="213360" cy="156210"/>
+          </a:xfrm>
+        </p:grpSpPr>
+        <p:sp>
+          <p:nvSpPr>
+            <p:cNvPr id="2" name="Freeform 2"/>
+            <p:cNvSpPr/>
+            <p:nvPr/>
+          </p:nvSpPr>
+          <p:spPr>
+            <a:xfrm>
+              <a:off x="620078" y="483870"/>
+              <a:ext cx="213360" cy="156210"/>
+            </a:xfrm>
+            <a:custGeom>
+              <a:avLst/>
+              <a:gdLst/>
+              <a:ahLst/>
+              <a:cxnLst/>
+              <a:rect l="l" t="t" r="r" b="b"/>
+              <a:pathLst>
+                <a:path w="213360" h="156210">
+                  <a:moveTo>
+                    <a:pt x="0" y="0"/>
+                  </a:moveTo>
+                  <a:lnTo>
+                    <a:pt x="213360" y="0"/>
+                  </a:lnTo>
+                  <a:lnTo>
+                    <a:pt x="213360" y="156210"/>
+                  </a:lnTo>
+                  <a:lnTo>
+                    <a:pt x="0" y="156210"/>
+                  </a:lnTo>
+                  <a:lnTo>
+                    <a:pt x="0" y="0"/>
+                  </a:lnTo>
+                  <a:close/>
+                </a:path>
+              </a:pathLst>
+            </a:custGeom>
+            <a:noFill/>
+            <a:ln w="20955" cap="rnd">
+              <a:solidFill>
+                <a:schemeClr val="accent1"/>
+              </a:solidFill>
+              <a:round/>
+            </a:ln>
+          </p:spPr>
+        </p:sp>
+        <p:sp>
+          <p:nvSpPr>
+            <p:cNvPr id="3" name="Freeform 3"/>
+            <p:cNvSpPr/>
+            <p:nvPr/>
+          </p:nvSpPr>
+          <p:spPr>
+            <a:xfrm>
+              <a:off x="620078" y="554355"/>
+              <a:ext cx="213360" cy="9525"/>
+            </a:xfrm>
+            <a:custGeom>
+              <a:avLst/>
+              <a:gdLst/>
+              <a:ahLst/>
+              <a:cxnLst/>
+              <a:rect l="l" t="t" r="r" b="b"/>
+              <a:pathLst>
+                <a:path w="213360" h="9525">
+                  <a:moveTo>
+                    <a:pt x="0" y="0"/>
+                  </a:moveTo>
+                  <a:lnTo>
+                    <a:pt x="213360" y="0"/>
+                  </a:lnTo>
+                </a:path>
+              </a:pathLst>
+            </a:custGeom>
+            <a:noFill/>
+            <a:ln w="20955" cap="rnd">
+              <a:solidFill>
+                <a:schemeClr val="accent1"/>
+              </a:solidFill>
+              <a:round/>
+            </a:ln>
+          </p:spPr>
+        </p:sp>
+        <p:sp>
+          <p:nvSpPr>
+            <p:cNvPr id="4" name="Freeform 4"/>
+            <p:cNvSpPr/>
+            <p:nvPr/>
+          </p:nvSpPr>
+          <p:spPr>
+            <a:xfrm>
+              <a:off x="704850" y="483870"/>
+              <a:ext cx="9525" cy="156210"/>
+            </a:xfrm>
+            <a:custGeom>
+              <a:avLst/>
+              <a:gdLst/>
+              <a:ahLst/>
+              <a:cxnLst/>
+              <a:rect l="l" t="t" r="r" b="b"/>
+              <a:pathLst>
+                <a:path w="9525" h="156210">
+                  <a:moveTo>
+                    <a:pt x="0" y="0"/>
+                  </a:moveTo>
+                  <a:lnTo>
+                    <a:pt x="0" y="156210"/>
+                  </a:lnTo>
+                </a:path>
+              </a:pathLst>
+            </a:custGeom>
+            <a:noFill/>
+            <a:ln w="20955" cap="rnd">
+              <a:solidFill>
+                <a:schemeClr val="accent1"/>
+              </a:solidFill>
+              <a:round/>
+            </a:ln>
+          </p:spPr>
+        </p:sp>
+        <p:sp>
+          <p:nvSpPr>
+            <p:cNvPr id="5" name="Freeform 5"/>
+            <p:cNvSpPr/>
+            <p:nvPr/>
+          </p:nvSpPr>
+          <p:spPr>
+            <a:xfrm>
+              <a:off x="768668" y="483870"/>
+              <a:ext cx="9525" cy="156210"/>
+            </a:xfrm>
+            <a:custGeom>
+              <a:avLst/>
+              <a:gdLst/>
+              <a:ahLst/>
+              <a:cxnLst/>
+              <a:rect l="l" t="t" r="r" b="b"/>
+              <a:pathLst>
+                <a:path w="9525" h="156210">
+                  <a:moveTo>
+                    <a:pt x="0" y="0"/>
+                  </a:moveTo>
+                  <a:lnTo>
+                    <a:pt x="0" y="156210"/>
+                  </a:lnTo>
+                </a:path>
+              </a:pathLst>
+            </a:custGeom>
+            <a:noFill/>
+            <a:ln w="20955" cap="rnd">
+              <a:solidFill>
+                <a:schemeClr val="accent1"/>
+              </a:solidFill>
+              <a:round/>
+            </a:ln>
+          </p:spPr>
+        </p:sp>
+      </p:grpSp>
+      <p:sp>
+        <p:nvSpPr>
+          <p:cNvPr id="7" name="TextBox 7"/>
+          <p:cNvSpPr txBox="1"/>
+          <p:nvPr/>
+        </p:nvSpPr>
+        <p:spPr>
+          <a:xfrm>
+            <a:off x="1083069" y="369522"/>
             <a:ext cx="2400999" cy="547135"/>
           </a:xfrm>
           <a:prstGeom prst="rect">
@@ -5265,13 +7582,13 @@
       </p:sp>
       <p:sp>
         <p:nvSpPr>
-          <p:cNvPr id="3" name="Rectangle 3"/>
+          <p:cNvPr id="8" name="Rectangle 8"/>
           <p:cNvSpPr/>
           <p:nvPr/>
         </p:nvSpPr>
         <p:spPr>
           <a:xfrm>
-            <a:off x="548640" y="1023938"/>
+            <a:off x="1097280" y="1023938"/>
             <a:ext cx="2011680" cy="38100"/>
           </a:xfrm>
           <a:prstGeom prst="rect">
@@ -5287,7 +7604,7 @@
       </p:sp>
       <p:sp>
         <p:nvSpPr>
-          <p:cNvPr id="4" name="Rectangle 4"/>
+          <p:cNvPr id="9" name="Rectangle 9"/>
           <p:cNvSpPr/>
           <p:nvPr/>
         </p:nvSpPr>
@@ -5309,7 +7626,7 @@
       </p:sp>
       <p:sp>
         <p:nvSpPr>
-          <p:cNvPr id="5" name="TextBox 5"/>
+          <p:cNvPr id="10" name="TextBox 10"/>
           <p:cNvSpPr txBox="1"/>
           <p:nvPr/>
         </p:nvSpPr>
@@ -5349,7 +7666,7 @@
       </p:sp>
       <p:sp>
         <p:nvSpPr>
-          <p:cNvPr id="6" name="Rectangle 6"/>
+          <p:cNvPr id="11" name="Rectangle 11"/>
           <p:cNvSpPr/>
           <p:nvPr/>
         </p:nvSpPr>
@@ -5371,7 +7688,7 @@
       </p:sp>
       <p:sp>
         <p:nvSpPr>
-          <p:cNvPr id="7" name="TextBox 7"/>
+          <p:cNvPr id="12" name="TextBox 12"/>
           <p:cNvSpPr txBox="1"/>
           <p:nvPr/>
         </p:nvSpPr>
@@ -5411,7 +7728,7 @@
       </p:sp>
       <p:sp>
         <p:nvSpPr>
-          <p:cNvPr id="8" name="Rectangle 8"/>
+          <p:cNvPr id="13" name="Rectangle 13"/>
           <p:cNvSpPr/>
           <p:nvPr/>
         </p:nvSpPr>
@@ -5433,7 +7750,7 @@
       </p:sp>
       <p:sp>
         <p:nvSpPr>
-          <p:cNvPr id="9" name="TextBox 9"/>
+          <p:cNvPr id="14" name="TextBox 14"/>
           <p:cNvSpPr txBox="1"/>
           <p:nvPr/>
         </p:nvSpPr>
@@ -5473,7 +7790,7 @@
       </p:sp>
       <p:sp>
         <p:nvSpPr>
-          <p:cNvPr id="10" name="Rectangle 10"/>
+          <p:cNvPr id="15" name="Rectangle 15"/>
           <p:cNvSpPr/>
           <p:nvPr/>
         </p:nvSpPr>
@@ -5495,7 +7812,7 @@
       </p:sp>
       <p:sp>
         <p:nvSpPr>
-          <p:cNvPr id="11" name="TextBox 11"/>
+          <p:cNvPr id="16" name="TextBox 16"/>
           <p:cNvSpPr txBox="1"/>
           <p:nvPr/>
         </p:nvSpPr>
@@ -5535,7 +7852,7 @@
       </p:sp>
       <p:sp>
         <p:nvSpPr>
-          <p:cNvPr id="12" name="Rectangle 12"/>
+          <p:cNvPr id="17" name="Rectangle 17"/>
           <p:cNvSpPr/>
           <p:nvPr/>
         </p:nvSpPr>
@@ -5557,7 +7874,7 @@
       </p:sp>
       <p:sp>
         <p:nvSpPr>
-          <p:cNvPr id="13" name="TextBox 13"/>
+          <p:cNvPr id="18" name="TextBox 18"/>
           <p:cNvSpPr txBox="1"/>
           <p:nvPr/>
         </p:nvSpPr>
@@ -5597,7 +7914,7 @@
       </p:sp>
       <p:sp>
         <p:nvSpPr>
-          <p:cNvPr id="14" name="Rectangle 14"/>
+          <p:cNvPr id="19" name="Rectangle 19"/>
           <p:cNvSpPr/>
           <p:nvPr/>
         </p:nvSpPr>
@@ -5619,7 +7936,7 @@
       </p:sp>
       <p:sp>
         <p:nvSpPr>
-          <p:cNvPr id="15" name="TextBox 15"/>
+          <p:cNvPr id="20" name="TextBox 20"/>
           <p:cNvSpPr txBox="1"/>
           <p:nvPr/>
         </p:nvSpPr>
@@ -5659,7 +7976,7 @@
       </p:sp>
       <p:sp>
         <p:nvSpPr>
-          <p:cNvPr id="16" name="Rectangle 16"/>
+          <p:cNvPr id="21" name="Rectangle 21"/>
           <p:cNvSpPr/>
           <p:nvPr/>
         </p:nvSpPr>
@@ -5681,7 +7998,7 @@
       </p:sp>
       <p:sp>
         <p:nvSpPr>
-          <p:cNvPr id="17" name="TextBox 17"/>
+          <p:cNvPr id="22" name="TextBox 22"/>
           <p:cNvSpPr txBox="1"/>
           <p:nvPr/>
         </p:nvSpPr>
@@ -5721,7 +8038,7 @@
       </p:sp>
       <p:sp>
         <p:nvSpPr>
-          <p:cNvPr id="18" name="Rectangle 18"/>
+          <p:cNvPr id="23" name="Rectangle 23"/>
           <p:cNvSpPr/>
           <p:nvPr/>
         </p:nvSpPr>
@@ -5743,7 +8060,7 @@
       </p:sp>
       <p:sp>
         <p:nvSpPr>
-          <p:cNvPr id="19" name="TextBox 19"/>
+          <p:cNvPr id="24" name="TextBox 24"/>
           <p:cNvSpPr txBox="1"/>
           <p:nvPr/>
         </p:nvSpPr>
@@ -5783,7 +8100,7 @@
       </p:sp>
       <p:sp>
         <p:nvSpPr>
-          <p:cNvPr id="20" name="Rectangle 20"/>
+          <p:cNvPr id="25" name="Rectangle 25"/>
           <p:cNvSpPr/>
           <p:nvPr/>
         </p:nvSpPr>
@@ -5805,7 +8122,7 @@
       </p:sp>
       <p:sp>
         <p:nvSpPr>
-          <p:cNvPr id="21" name="TextBox 21"/>
+          <p:cNvPr id="26" name="TextBox 26"/>
           <p:cNvSpPr txBox="1"/>
           <p:nvPr/>
         </p:nvSpPr>
@@ -5845,7 +8162,7 @@
       </p:sp>
       <p:sp>
         <p:nvSpPr>
-          <p:cNvPr id="22" name="Rectangle 22"/>
+          <p:cNvPr id="27" name="Rectangle 27"/>
           <p:cNvSpPr/>
           <p:nvPr/>
         </p:nvSpPr>
@@ -5867,7 +8184,7 @@
       </p:sp>
       <p:sp>
         <p:nvSpPr>
-          <p:cNvPr id="23" name="TextBox 23"/>
+          <p:cNvPr id="28" name="TextBox 28"/>
           <p:cNvSpPr txBox="1"/>
           <p:nvPr/>
         </p:nvSpPr>
@@ -5907,7 +8224,7 @@
       </p:sp>
       <p:sp>
         <p:nvSpPr>
-          <p:cNvPr id="24" name="Rectangle 24"/>
+          <p:cNvPr id="29" name="Rectangle 29"/>
           <p:cNvSpPr/>
           <p:nvPr/>
         </p:nvSpPr>
@@ -5929,7 +8246,7 @@
       </p:sp>
       <p:sp>
         <p:nvSpPr>
-          <p:cNvPr id="25" name="TextBox 25"/>
+          <p:cNvPr id="30" name="TextBox 30"/>
           <p:cNvSpPr txBox="1"/>
           <p:nvPr/>
         </p:nvSpPr>
@@ -5969,7 +8286,7 @@
       </p:sp>
       <p:sp>
         <p:nvSpPr>
-          <p:cNvPr id="26" name="Rectangle 26"/>
+          <p:cNvPr id="31" name="Rectangle 31"/>
           <p:cNvSpPr/>
           <p:nvPr/>
         </p:nvSpPr>
@@ -5991,7 +8308,7 @@
       </p:sp>
       <p:sp>
         <p:nvSpPr>
-          <p:cNvPr id="27" name="TextBox 27"/>
+          <p:cNvPr id="32" name="TextBox 32"/>
           <p:cNvSpPr txBox="1"/>
           <p:nvPr/>
         </p:nvSpPr>
@@ -6031,7 +8348,7 @@
       </p:sp>
       <p:sp>
         <p:nvSpPr>
-          <p:cNvPr id="28" name="Rectangle 28"/>
+          <p:cNvPr id="33" name="Rectangle 33"/>
           <p:cNvSpPr/>
           <p:nvPr/>
         </p:nvSpPr>
@@ -6053,7 +8370,7 @@
       </p:sp>
       <p:sp>
         <p:nvSpPr>
-          <p:cNvPr id="29" name="TextBox 29"/>
+          <p:cNvPr id="34" name="TextBox 34"/>
           <p:cNvSpPr txBox="1"/>
           <p:nvPr/>
         </p:nvSpPr>
@@ -6093,7 +8410,7 @@
       </p:sp>
       <p:sp>
         <p:nvSpPr>
-          <p:cNvPr id="30" name="Rectangle 30"/>
+          <p:cNvPr id="35" name="Rectangle 35"/>
           <p:cNvSpPr/>
           <p:nvPr/>
         </p:nvSpPr>
@@ -6115,7 +8432,7 @@
       </p:sp>
       <p:sp>
         <p:nvSpPr>
-          <p:cNvPr id="31" name="TextBox 31"/>
+          <p:cNvPr id="36" name="TextBox 36"/>
           <p:cNvSpPr txBox="1"/>
           <p:nvPr/>
         </p:nvSpPr>
@@ -6155,7 +8472,7 @@
       </p:sp>
       <p:sp>
         <p:nvSpPr>
-          <p:cNvPr id="32" name="Rectangle 32"/>
+          <p:cNvPr id="37" name="Rectangle 37"/>
           <p:cNvSpPr/>
           <p:nvPr/>
         </p:nvSpPr>
@@ -6177,7 +8494,7 @@
       </p:sp>
       <p:sp>
         <p:nvSpPr>
-          <p:cNvPr id="33" name="TextBox 33"/>
+          <p:cNvPr id="38" name="TextBox 38"/>
           <p:cNvSpPr txBox="1"/>
           <p:nvPr/>
         </p:nvSpPr>
@@ -6217,7 +8534,7 @@
       </p:sp>
       <p:sp>
         <p:nvSpPr>
-          <p:cNvPr id="34" name="Rectangle 34"/>
+          <p:cNvPr id="39" name="Rectangle 39"/>
           <p:cNvSpPr/>
           <p:nvPr/>
         </p:nvSpPr>
@@ -6239,7 +8556,7 @@
       </p:sp>
       <p:sp>
         <p:nvSpPr>
-          <p:cNvPr id="35" name="TextBox 35"/>
+          <p:cNvPr id="40" name="TextBox 40"/>
           <p:cNvSpPr txBox="1"/>
           <p:nvPr/>
         </p:nvSpPr>
@@ -6279,7 +8596,7 @@
       </p:sp>
       <p:sp>
         <p:nvSpPr>
-          <p:cNvPr id="36" name="TextBox 36"/>
+          <p:cNvPr id="41" name="TextBox 41"/>
           <p:cNvSpPr txBox="1"/>
           <p:nvPr/>
         </p:nvSpPr>
@@ -6319,7 +8636,7 @@
       </p:sp>
       <p:sp>
         <p:nvSpPr>
-          <p:cNvPr id="37" name="TextBox 37"/>
+          <p:cNvPr id="42" name="TextBox 42"/>
           <p:cNvSpPr txBox="1"/>
           <p:nvPr/>
         </p:nvSpPr>

--- a/output/hifi.pptx
+++ b/output/hifi.pptx
@@ -120,7 +120,7 @@
 
 <file path=ppt/slideLayouts/slideLayout7.xml><?xml version="1.0" encoding="utf-8"?>
 <p:sldLayout xmlns:a="http://schemas.openxmlformats.org/drawingml/2006/main" xmlns:p="http://schemas.openxmlformats.org/presentationml/2006/main" type="blank" preserve="1">
-  <p:cSld name="project — Blank">
+  <p:cSld name="hifi_project — Blank">
     <p:spTree>
       <p:nvGrpSpPr>
         <p:cNvPr id="1" name=""/>
@@ -210,7 +210,7 @@
 
 <file path=ppt/slideMasters/slideMaster1.xml><?xml version="1.0" encoding="utf-8"?>
 <p:sldMaster xmlns:a="http://schemas.openxmlformats.org/drawingml/2006/main" xmlns:p="http://schemas.openxmlformats.org/presentationml/2006/main" xmlns:r="http://schemas.openxmlformats.org/officeDocument/2006/relationships">
-  <p:cSld name="project — Master">
+  <p:cSld name="hifi_project — Master">
     <p:bg>
       <p:bgRef idx="1001">
         <a:schemeClr val="bg1"/>
@@ -3468,8 +3468,8 @@
         </p:nvSpPr>
         <p:spPr>
           <a:xfrm>
-            <a:off x="0" y="2834640"/>
-            <a:ext cx="12192000" cy="1188720"/>
+            <a:off x="0" y="2468880"/>
+            <a:ext cx="12192000" cy="1828800"/>
           </a:xfrm>
           <a:prstGeom prst="rect">
             <a:avLst/>
@@ -3490,8 +3490,8 @@
         </p:nvSpPr>
         <p:spPr>
           <a:xfrm>
-            <a:off x="0" y="2834640"/>
-            <a:ext cx="38100" cy="1188720"/>
+            <a:off x="0" y="2468880"/>
+            <a:ext cx="38100" cy="1828800"/>
           </a:xfrm>
           <a:prstGeom prst="rect">
             <a:avLst/>
@@ -3506,14 +3506,14 @@
       </p:sp>
       <p:sp>
         <p:nvSpPr>
-          <p:cNvPr id="4" name="Freeform 4"/>
+          <p:cNvPr id="4" name="Line 4"/>
           <p:cNvSpPr/>
           <p:nvPr/>
         </p:nvSpPr>
         <p:spPr>
           <a:xfrm>
-            <a:off x="723900" y="3104198"/>
-            <a:ext cx="233362" cy="374333"/>
+            <a:off x="3108960" y="2651760"/>
+            <a:ext cx="9525" cy="1463040"/>
           </a:xfrm>
           <a:custGeom>
             <a:avLst/>
@@ -3522,48 +3522,98 @@
             <a:cxnLst/>
             <a:rect l="l" t="t" r="r" b="b"/>
             <a:pathLst>
-              <a:path w="233362" h="374333">
+              <a:path w="9525" h="1463040">
                 <a:moveTo>
                   <a:pt x="0" y="0"/>
                 </a:moveTo>
                 <a:lnTo>
-                  <a:pt x="233362" y="0"/>
+                  <a:pt x="0" y="1463040"/>
                 </a:lnTo>
-                <a:lnTo>
-                  <a:pt x="233362" y="374333"/>
-                </a:lnTo>
-                <a:lnTo>
-                  <a:pt x="117157" y="280988"/>
-                </a:lnTo>
-                <a:lnTo>
-                  <a:pt x="0" y="374333"/>
-                </a:lnTo>
-                <a:lnTo>
-                  <a:pt x="0" y="0"/>
-                </a:lnTo>
-                <a:close/>
               </a:path>
             </a:pathLst>
           </a:custGeom>
           <a:noFill/>
-          <a:ln w="35242" cap="rnd">
+          <a:ln w="9525">
             <a:solidFill>
-              <a:schemeClr val="accent1"/>
+              <a:srgbClr val="30363D"/>
             </a:solidFill>
-            <a:round/>
-          </a:ln>
-        </p:spPr>
-      </p:sp>
-      <p:sp>
-        <p:nvSpPr>
-          <p:cNvPr id="5" name="TextBox 5"/>
-          <p:cNvSpPr txBox="1"/>
-          <p:nvPr/>
-        </p:nvSpPr>
-        <p:spPr>
-          <a:xfrm>
-            <a:off x="1537221" y="2976515"/>
-            <a:ext cx="2627815" cy="664483"/>
+          </a:ln>
+        </p:spPr>
+      </p:sp>
+      <p:sp>
+        <p:nvSpPr>
+          <p:cNvPr id="5" name="Ellipse 5"/>
+          <p:cNvSpPr/>
+          <p:nvPr/>
+        </p:nvSpPr>
+        <p:spPr>
+          <a:xfrm>
+            <a:off x="10297478" y="2799398"/>
+            <a:ext cx="1167765" cy="1167765"/>
+          </a:xfrm>
+          <a:prstGeom prst="ellipse">
+            <a:avLst/>
+          </a:prstGeom>
+          <a:noFill/>
+          <a:ln w="19050">
+            <a:solidFill>
+              <a:schemeClr val="accent1">
+                <a:alpha val="50000"/>
+              </a:schemeClr>
+            </a:solidFill>
+          </a:ln>
+        </p:spPr>
+      </p:sp>
+      <p:sp>
+        <p:nvSpPr>
+          <p:cNvPr id="6" name="TextBox 6"/>
+          <p:cNvSpPr txBox="1"/>
+          <p:nvPr/>
+        </p:nvSpPr>
+        <p:spPr>
+          <a:xfrm>
+            <a:off x="1063417" y="2892742"/>
+            <a:ext cx="1530767" cy="1847850"/>
+          </a:xfrm>
+          <a:prstGeom prst="rect">
+            <a:avLst/>
+          </a:prstGeom>
+          <a:noFill/>
+          <a:ln>
+            <a:noFill/>
+          </a:ln>
+        </p:spPr>
+        <p:txBody>
+          <a:bodyPr wrap="none" lIns="0" tIns="0" rIns="0" bIns="0" anchor="t" anchorCtr="0">
+            <a:spAutoFit/>
+          </a:bodyPr>
+          <a:lstStyle/>
+          <a:p>
+            <a:pPr algn="ctr"/>
+            <a:r>
+              <a:rPr lang="en-US" sz="9600" b="1" dirty="0">
+                <a:solidFill>
+                  <a:schemeClr val="accent2"/>
+                </a:solidFill>
+                <a:latin typeface="+mn-lt"/>
+                <a:ea typeface="+mn-ea"/>
+                <a:cs typeface="+mn-cs"/>
+              </a:rPr>
+              <a:t>01</a:t>
+            </a:r>
+          </a:p>
+        </p:txBody>
+      </p:sp>
+      <p:sp>
+        <p:nvSpPr>
+          <p:cNvPr id="7" name="TextBox 7"/>
+          <p:cNvSpPr txBox="1"/>
+          <p:nvPr/>
+        </p:nvSpPr>
+        <p:spPr>
+          <a:xfrm>
+            <a:off x="3366021" y="2702195"/>
+            <a:ext cx="1955479" cy="664483"/>
           </a:xfrm>
           <a:prstGeom prst="rect">
             <a:avLst/>
@@ -3589,20 +3639,20 @@
                 <a:ea typeface="+mn-ea"/>
                 <a:cs typeface="+mn-cs"/>
               </a:rPr>
-              <a:t>01 市场机会</a:t>
-            </a:r>
-          </a:p>
-        </p:txBody>
-      </p:sp>
-      <p:sp>
-        <p:nvSpPr>
-          <p:cNvPr id="6" name="TextBox 6"/>
-          <p:cNvSpPr txBox="1"/>
-          <p:nvPr/>
-        </p:nvSpPr>
-        <p:spPr>
-          <a:xfrm>
-            <a:off x="1547355" y="3933873"/>
+              <a:t>市场机会</a:t>
+            </a:r>
+          </a:p>
+        </p:txBody>
+      </p:sp>
+      <p:sp>
+        <p:nvSpPr>
+          <p:cNvPr id="8" name="TextBox 8"/>
+          <p:cNvSpPr txBox="1"/>
+          <p:nvPr/>
+        </p:nvSpPr>
+        <p:spPr>
+          <a:xfrm>
+            <a:off x="3376155" y="3888153"/>
             <a:ext cx="1713490" cy="274301"/>
           </a:xfrm>
           <a:prstGeom prst="rect">
@@ -4902,32 +4952,68 @@
       </p:sp>
       <p:sp>
         <p:nvSpPr>
-          <p:cNvPr id="11" name="TextBox 11"/>
-          <p:cNvSpPr txBox="1"/>
-          <p:nvPr/>
-        </p:nvSpPr>
-        <p:spPr>
-          <a:xfrm>
-            <a:off x="816864" y="2054543"/>
-            <a:ext cx="367589" cy="234696"/>
-          </a:xfrm>
-          <a:prstGeom prst="rect">
-            <a:avLst/>
-          </a:prstGeom>
-          <a:noFill/>
-          <a:ln>
-            <a:noFill/>
-          </a:ln>
-        </p:spPr>
-        <p:txBody>
-          <a:bodyPr wrap="none" lIns="0" tIns="0" rIns="0" bIns="0" anchor="t" anchorCtr="0">
-            <a:spAutoFit/>
-          </a:bodyPr>
-          <a:lstStyle/>
-          <a:p>
-            <a:pPr algn="l"/>
-            <a:r>
-              <a:rPr lang="en-US" sz="1200" dirty="0">
+          <p:cNvPr id="11" name="Line 11"/>
+          <p:cNvSpPr/>
+          <p:nvPr/>
+        </p:nvSpPr>
+        <p:spPr>
+          <a:xfrm>
+            <a:off x="822960" y="5760720"/>
+            <a:ext cx="10515600" cy="9525"/>
+          </a:xfrm>
+          <a:custGeom>
+            <a:avLst/>
+            <a:gdLst/>
+            <a:ahLst/>
+            <a:cxnLst/>
+            <a:rect l="l" t="t" r="r" b="b"/>
+            <a:pathLst>
+              <a:path w="10515600" h="9525">
+                <a:moveTo>
+                  <a:pt x="0" y="0"/>
+                </a:moveTo>
+                <a:lnTo>
+                  <a:pt x="10515600" y="0"/>
+                </a:lnTo>
+              </a:path>
+            </a:pathLst>
+          </a:custGeom>
+          <a:noFill/>
+          <a:ln w="9525">
+            <a:solidFill>
+              <a:srgbClr val="30363D"/>
+            </a:solidFill>
+          </a:ln>
+        </p:spPr>
+      </p:sp>
+      <p:sp>
+        <p:nvSpPr>
+          <p:cNvPr id="12" name="TextBox 12"/>
+          <p:cNvSpPr txBox="1"/>
+          <p:nvPr/>
+        </p:nvSpPr>
+        <p:spPr>
+          <a:xfrm>
+            <a:off x="626192" y="5812203"/>
+            <a:ext cx="92832" cy="215627"/>
+          </a:xfrm>
+          <a:prstGeom prst="rect">
+            <a:avLst/>
+          </a:prstGeom>
+          <a:noFill/>
+          <a:ln>
+            <a:noFill/>
+          </a:ln>
+        </p:spPr>
+        <p:txBody>
+          <a:bodyPr wrap="none" lIns="0" tIns="0" rIns="0" bIns="0" anchor="t" anchorCtr="0">
+            <a:spAutoFit/>
+          </a:bodyPr>
+          <a:lstStyle/>
+          <a:p>
+            <a:pPr algn="r"/>
+            <a:r>
+              <a:rPr lang="en-US" sz="1100" dirty="0">
                 <a:solidFill>
                   <a:srgbClr val="8B949E"/>
                 </a:solidFill>
@@ -4935,25 +5021,329 @@
                 <a:ea typeface="+mn-ea"/>
                 <a:cs typeface="+mn-cs"/>
               </a:rPr>
-              <a:t>2024</a:t>
-            </a:r>
-          </a:p>
-        </p:txBody>
-      </p:sp>
-      <p:sp>
-        <p:nvSpPr>
-          <p:cNvPr id="12" name="Rectangle 12"/>
+              <a:t>0</a:t>
+            </a:r>
+          </a:p>
+        </p:txBody>
+      </p:sp>
+      <p:sp>
+        <p:nvSpPr>
+          <p:cNvPr id="13" name="Line 13"/>
           <p:cNvSpPr/>
           <p:nvPr/>
         </p:nvSpPr>
         <p:spPr>
           <a:xfrm>
-            <a:off x="2286000" y="1928812"/>
-            <a:ext cx="1062990" cy="623888"/>
+            <a:off x="822960" y="4754880"/>
+            <a:ext cx="10515600" cy="9525"/>
+          </a:xfrm>
+          <a:custGeom>
+            <a:avLst/>
+            <a:gdLst/>
+            <a:ahLst/>
+            <a:cxnLst/>
+            <a:rect l="l" t="t" r="r" b="b"/>
+            <a:pathLst>
+              <a:path w="10515600" h="9525">
+                <a:moveTo>
+                  <a:pt x="0" y="0"/>
+                </a:moveTo>
+                <a:lnTo>
+                  <a:pt x="10515600" y="0"/>
+                </a:lnTo>
+              </a:path>
+            </a:pathLst>
+          </a:custGeom>
+          <a:noFill/>
+          <a:ln w="9525">
+            <a:solidFill>
+              <a:srgbClr val="30363D"/>
+            </a:solidFill>
+          </a:ln>
+        </p:spPr>
+      </p:sp>
+      <p:sp>
+        <p:nvSpPr>
+          <p:cNvPr id="14" name="TextBox 14"/>
+          <p:cNvSpPr txBox="1"/>
+          <p:nvPr/>
+        </p:nvSpPr>
+        <p:spPr>
+          <a:xfrm>
+            <a:off x="462931" y="4806363"/>
+            <a:ext cx="256092" cy="215627"/>
+          </a:xfrm>
+          <a:prstGeom prst="rect">
+            <a:avLst/>
+          </a:prstGeom>
+          <a:noFill/>
+          <a:ln>
+            <a:noFill/>
+          </a:ln>
+        </p:spPr>
+        <p:txBody>
+          <a:bodyPr wrap="none" lIns="0" tIns="0" rIns="0" bIns="0" anchor="t" anchorCtr="0">
+            <a:spAutoFit/>
+          </a:bodyPr>
+          <a:lstStyle/>
+          <a:p>
+            <a:pPr algn="r"/>
+            <a:r>
+              <a:rPr lang="en-US" sz="1100" dirty="0">
+                <a:solidFill>
+                  <a:srgbClr val="8B949E"/>
+                </a:solidFill>
+                <a:latin typeface="+mn-lt"/>
+                <a:ea typeface="+mn-ea"/>
+                <a:cs typeface="+mn-cs"/>
+              </a:rPr>
+              <a:t>320</a:t>
+            </a:r>
+          </a:p>
+        </p:txBody>
+      </p:sp>
+      <p:sp>
+        <p:nvSpPr>
+          <p:cNvPr id="15" name="Line 15"/>
+          <p:cNvSpPr/>
+          <p:nvPr/>
+        </p:nvSpPr>
+        <p:spPr>
+          <a:xfrm>
+            <a:off x="822960" y="3749040"/>
+            <a:ext cx="10515600" cy="9525"/>
+          </a:xfrm>
+          <a:custGeom>
+            <a:avLst/>
+            <a:gdLst/>
+            <a:ahLst/>
+            <a:cxnLst/>
+            <a:rect l="l" t="t" r="r" b="b"/>
+            <a:pathLst>
+              <a:path w="10515600" h="9525">
+                <a:moveTo>
+                  <a:pt x="0" y="0"/>
+                </a:moveTo>
+                <a:lnTo>
+                  <a:pt x="10515600" y="0"/>
+                </a:lnTo>
+              </a:path>
+            </a:pathLst>
+          </a:custGeom>
+          <a:noFill/>
+          <a:ln w="9525">
+            <a:solidFill>
+              <a:srgbClr val="30363D"/>
+            </a:solidFill>
+          </a:ln>
+        </p:spPr>
+      </p:sp>
+      <p:sp>
+        <p:nvSpPr>
+          <p:cNvPr id="16" name="TextBox 16"/>
+          <p:cNvSpPr txBox="1"/>
+          <p:nvPr/>
+        </p:nvSpPr>
+        <p:spPr>
+          <a:xfrm>
+            <a:off x="462931" y="3800523"/>
+            <a:ext cx="256092" cy="215627"/>
+          </a:xfrm>
+          <a:prstGeom prst="rect">
+            <a:avLst/>
+          </a:prstGeom>
+          <a:noFill/>
+          <a:ln>
+            <a:noFill/>
+          </a:ln>
+        </p:spPr>
+        <p:txBody>
+          <a:bodyPr wrap="none" lIns="0" tIns="0" rIns="0" bIns="0" anchor="t" anchorCtr="0">
+            <a:spAutoFit/>
+          </a:bodyPr>
+          <a:lstStyle/>
+          <a:p>
+            <a:pPr algn="r"/>
+            <a:r>
+              <a:rPr lang="en-US" sz="1100" dirty="0">
+                <a:solidFill>
+                  <a:srgbClr val="8B949E"/>
+                </a:solidFill>
+                <a:latin typeface="+mn-lt"/>
+                <a:ea typeface="+mn-ea"/>
+                <a:cs typeface="+mn-cs"/>
+              </a:rPr>
+              <a:t>640</a:t>
+            </a:r>
+          </a:p>
+        </p:txBody>
+      </p:sp>
+      <p:sp>
+        <p:nvSpPr>
+          <p:cNvPr id="17" name="Line 17"/>
+          <p:cNvSpPr/>
+          <p:nvPr/>
+        </p:nvSpPr>
+        <p:spPr>
+          <a:xfrm>
+            <a:off x="822960" y="2743200"/>
+            <a:ext cx="10515600" cy="9525"/>
+          </a:xfrm>
+          <a:custGeom>
+            <a:avLst/>
+            <a:gdLst/>
+            <a:ahLst/>
+            <a:cxnLst/>
+            <a:rect l="l" t="t" r="r" b="b"/>
+            <a:pathLst>
+              <a:path w="10515600" h="9525">
+                <a:moveTo>
+                  <a:pt x="0" y="0"/>
+                </a:moveTo>
+                <a:lnTo>
+                  <a:pt x="10515600" y="0"/>
+                </a:lnTo>
+              </a:path>
+            </a:pathLst>
+          </a:custGeom>
+          <a:noFill/>
+          <a:ln w="9525">
+            <a:solidFill>
+              <a:srgbClr val="30363D"/>
+            </a:solidFill>
+          </a:ln>
+        </p:spPr>
+      </p:sp>
+      <p:sp>
+        <p:nvSpPr>
+          <p:cNvPr id="18" name="TextBox 18"/>
+          <p:cNvSpPr txBox="1"/>
+          <p:nvPr/>
+        </p:nvSpPr>
+        <p:spPr>
+          <a:xfrm>
+            <a:off x="462931" y="2794683"/>
+            <a:ext cx="256092" cy="215627"/>
+          </a:xfrm>
+          <a:prstGeom prst="rect">
+            <a:avLst/>
+          </a:prstGeom>
+          <a:noFill/>
+          <a:ln>
+            <a:noFill/>
+          </a:ln>
+        </p:spPr>
+        <p:txBody>
+          <a:bodyPr wrap="none" lIns="0" tIns="0" rIns="0" bIns="0" anchor="t" anchorCtr="0">
+            <a:spAutoFit/>
+          </a:bodyPr>
+          <a:lstStyle/>
+          <a:p>
+            <a:pPr algn="r"/>
+            <a:r>
+              <a:rPr lang="en-US" sz="1100" dirty="0">
+                <a:solidFill>
+                  <a:srgbClr val="8B949E"/>
+                </a:solidFill>
+                <a:latin typeface="+mn-lt"/>
+                <a:ea typeface="+mn-ea"/>
+                <a:cs typeface="+mn-cs"/>
+              </a:rPr>
+              <a:t>960</a:t>
+            </a:r>
+          </a:p>
+        </p:txBody>
+      </p:sp>
+      <p:sp>
+        <p:nvSpPr>
+          <p:cNvPr id="19" name="Line 19"/>
+          <p:cNvSpPr/>
+          <p:nvPr/>
+        </p:nvSpPr>
+        <p:spPr>
+          <a:xfrm>
+            <a:off x="822960" y="1737360"/>
+            <a:ext cx="10515600" cy="9525"/>
+          </a:xfrm>
+          <a:custGeom>
+            <a:avLst/>
+            <a:gdLst/>
+            <a:ahLst/>
+            <a:cxnLst/>
+            <a:rect l="l" t="t" r="r" b="b"/>
+            <a:pathLst>
+              <a:path w="10515600" h="9525">
+                <a:moveTo>
+                  <a:pt x="0" y="0"/>
+                </a:moveTo>
+                <a:lnTo>
+                  <a:pt x="10515600" y="0"/>
+                </a:lnTo>
+              </a:path>
+            </a:pathLst>
+          </a:custGeom>
+          <a:noFill/>
+          <a:ln w="9525">
+            <a:solidFill>
+              <a:srgbClr val="30363D"/>
+            </a:solidFill>
+          </a:ln>
+        </p:spPr>
+      </p:sp>
+      <p:sp>
+        <p:nvSpPr>
+          <p:cNvPr id="20" name="TextBox 20"/>
+          <p:cNvSpPr txBox="1"/>
+          <p:nvPr/>
+        </p:nvSpPr>
+        <p:spPr>
+          <a:xfrm>
+            <a:off x="381301" y="1788843"/>
+            <a:ext cx="337722" cy="215627"/>
+          </a:xfrm>
+          <a:prstGeom prst="rect">
+            <a:avLst/>
+          </a:prstGeom>
+          <a:noFill/>
+          <a:ln>
+            <a:noFill/>
+          </a:ln>
+        </p:spPr>
+        <p:txBody>
+          <a:bodyPr wrap="none" lIns="0" tIns="0" rIns="0" bIns="0" anchor="t" anchorCtr="0">
+            <a:spAutoFit/>
+          </a:bodyPr>
+          <a:lstStyle/>
+          <a:p>
+            <a:pPr algn="r"/>
+            <a:r>
+              <a:rPr lang="en-US" sz="1100" dirty="0">
+                <a:solidFill>
+                  <a:srgbClr val="8B949E"/>
+                </a:solidFill>
+                <a:latin typeface="+mn-lt"/>
+                <a:ea typeface="+mn-ea"/>
+                <a:cs typeface="+mn-cs"/>
+              </a:rPr>
+              <a:t>1280</a:t>
+            </a:r>
+          </a:p>
+        </p:txBody>
+      </p:sp>
+      <p:sp>
+        <p:nvSpPr>
+          <p:cNvPr id="21" name="Rectangle 21"/>
+          <p:cNvSpPr/>
+          <p:nvPr/>
+        </p:nvSpPr>
+        <p:spPr>
+          <a:xfrm>
+            <a:off x="1553528" y="5407342"/>
+            <a:ext cx="721995" cy="353378"/>
           </a:xfrm>
           <a:prstGeom prst="roundRect">
             <a:avLst>
-              <a:gd name="adj" fmla="val 3053"/>
+              <a:gd name="adj" fmla="val 5391"/>
             </a:avLst>
           </a:prstGeom>
           <a:solidFill>
@@ -4966,13 +5356,13 @@
       </p:sp>
       <p:sp>
         <p:nvSpPr>
-          <p:cNvPr id="13" name="TextBox 13"/>
-          <p:cNvSpPr txBox="1"/>
-          <p:nvPr/>
-        </p:nvSpPr>
-        <p:spPr>
-          <a:xfrm>
-            <a:off x="3434829" y="2042208"/>
+          <p:cNvPr id="22" name="TextBox 22"/>
+          <p:cNvSpPr txBox="1"/>
+          <p:nvPr/>
+        </p:nvSpPr>
+        <p:spPr>
+          <a:xfrm>
+            <a:off x="1786479" y="5357860"/>
             <a:ext cx="256092" cy="215627"/>
           </a:xfrm>
           <a:prstGeom prst="rect">
@@ -4989,7 +5379,7 @@
           </a:bodyPr>
           <a:lstStyle/>
           <a:p>
-            <a:pPr algn="l"/>
+            <a:pPr algn="ctr"/>
             <a:r>
               <a:rPr lang="en-US" sz="1100" dirty="0">
                 <a:solidFill>
@@ -5006,58 +5396,122 @@
       </p:sp>
       <p:sp>
         <p:nvSpPr>
-          <p:cNvPr id="14" name="TextBox 14"/>
-          <p:cNvSpPr txBox="1"/>
-          <p:nvPr/>
-        </p:nvSpPr>
-        <p:spPr>
-          <a:xfrm>
-            <a:off x="816864" y="3060382"/>
-            <a:ext cx="367589" cy="234696"/>
-          </a:xfrm>
-          <a:prstGeom prst="rect">
-            <a:avLst/>
-          </a:prstGeom>
-          <a:noFill/>
-          <a:ln>
-            <a:noFill/>
-          </a:ln>
-        </p:spPr>
-        <p:txBody>
-          <a:bodyPr wrap="none" lIns="0" tIns="0" rIns="0" bIns="0" anchor="t" anchorCtr="0">
-            <a:spAutoFit/>
-          </a:bodyPr>
-          <a:lstStyle/>
-          <a:p>
-            <a:pPr algn="l"/>
-            <a:r>
-              <a:rPr lang="en-US" sz="1200" dirty="0">
-                <a:solidFill>
-                  <a:srgbClr val="8B949E"/>
-                </a:solidFill>
-                <a:latin typeface="+mn-lt"/>
-                <a:ea typeface="+mn-ea"/>
-                <a:cs typeface="+mn-cs"/>
-              </a:rPr>
-              <a:t>2025</a:t>
-            </a:r>
-          </a:p>
-        </p:txBody>
-      </p:sp>
-      <p:sp>
-        <p:nvSpPr>
-          <p:cNvPr id="15" name="Rectangle 15"/>
+          <p:cNvPr id="23" name="Rectangle 23"/>
           <p:cNvSpPr/>
           <p:nvPr/>
         </p:nvSpPr>
         <p:spPr>
           <a:xfrm>
-            <a:off x="2286000" y="2934652"/>
-            <a:ext cx="2480310" cy="623888"/>
+            <a:off x="2433638" y="5172075"/>
+            <a:ext cx="721995" cy="588645"/>
           </a:xfrm>
           <a:prstGeom prst="roundRect">
             <a:avLst>
-              <a:gd name="adj" fmla="val 3053"/>
+              <a:gd name="adj" fmla="val 3236"/>
+            </a:avLst>
+          </a:prstGeom>
+          <a:solidFill>
+            <a:schemeClr val="accent5"/>
+          </a:solidFill>
+          <a:ln>
+            <a:noFill/>
+          </a:ln>
+        </p:spPr>
+      </p:sp>
+      <p:sp>
+        <p:nvSpPr>
+          <p:cNvPr id="24" name="TextBox 24"/>
+          <p:cNvSpPr txBox="1"/>
+          <p:nvPr/>
+        </p:nvSpPr>
+        <p:spPr>
+          <a:xfrm>
+            <a:off x="2666589" y="5121640"/>
+            <a:ext cx="256092" cy="215627"/>
+          </a:xfrm>
+          <a:prstGeom prst="rect">
+            <a:avLst/>
+          </a:prstGeom>
+          <a:noFill/>
+          <a:ln>
+            <a:noFill/>
+          </a:ln>
+        </p:spPr>
+        <p:txBody>
+          <a:bodyPr wrap="none" lIns="0" tIns="0" rIns="0" bIns="0" anchor="t" anchorCtr="0">
+            <a:spAutoFit/>
+          </a:bodyPr>
+          <a:lstStyle/>
+          <a:p>
+            <a:pPr algn="ctr"/>
+            <a:r>
+              <a:rPr lang="en-US" sz="1100" dirty="0">
+                <a:solidFill>
+                  <a:schemeClr val="accent5"/>
+                </a:solidFill>
+                <a:latin typeface="+mn-lt"/>
+                <a:ea typeface="+mn-ea"/>
+                <a:cs typeface="+mn-cs"/>
+              </a:rPr>
+              <a:t>200</a:t>
+            </a:r>
+          </a:p>
+        </p:txBody>
+      </p:sp>
+      <p:sp>
+        <p:nvSpPr>
+          <p:cNvPr id="25" name="TextBox 25"/>
+          <p:cNvSpPr txBox="1"/>
+          <p:nvPr/>
+        </p:nvSpPr>
+        <p:spPr>
+          <a:xfrm>
+            <a:off x="2185719" y="5837920"/>
+            <a:ext cx="337722" cy="215627"/>
+          </a:xfrm>
+          <a:prstGeom prst="rect">
+            <a:avLst/>
+          </a:prstGeom>
+          <a:noFill/>
+          <a:ln>
+            <a:noFill/>
+          </a:ln>
+        </p:spPr>
+        <p:txBody>
+          <a:bodyPr wrap="none" lIns="0" tIns="0" rIns="0" bIns="0" anchor="t" anchorCtr="0">
+            <a:spAutoFit/>
+          </a:bodyPr>
+          <a:lstStyle/>
+          <a:p>
+            <a:pPr algn="ctr"/>
+            <a:r>
+              <a:rPr lang="en-US" sz="1100" dirty="0">
+                <a:solidFill>
+                  <a:srgbClr val="8B949E"/>
+                </a:solidFill>
+                <a:latin typeface="+mn-lt"/>
+                <a:ea typeface="+mn-ea"/>
+                <a:cs typeface="+mn-cs"/>
+              </a:rPr>
+              <a:t>2024</a:t>
+            </a:r>
+          </a:p>
+        </p:txBody>
+      </p:sp>
+      <p:sp>
+        <p:nvSpPr>
+          <p:cNvPr id="26" name="Rectangle 26"/>
+          <p:cNvSpPr/>
+          <p:nvPr/>
+        </p:nvSpPr>
+        <p:spPr>
+          <a:xfrm>
+            <a:off x="4068128" y="4935855"/>
+            <a:ext cx="721995" cy="824865"/>
+          </a:xfrm>
+          <a:prstGeom prst="roundRect">
+            <a:avLst>
+              <a:gd name="adj" fmla="val 2639"/>
             </a:avLst>
           </a:prstGeom>
           <a:solidFill>
@@ -5070,13 +5524,13 @@
       </p:sp>
       <p:sp>
         <p:nvSpPr>
-          <p:cNvPr id="16" name="TextBox 16"/>
-          <p:cNvSpPr txBox="1"/>
-          <p:nvPr/>
-        </p:nvSpPr>
-        <p:spPr>
-          <a:xfrm>
-            <a:off x="4852149" y="3048048"/>
+          <p:cNvPr id="27" name="TextBox 27"/>
+          <p:cNvSpPr txBox="1"/>
+          <p:nvPr/>
+        </p:nvSpPr>
+        <p:spPr>
+          <a:xfrm>
+            <a:off x="4301079" y="4886373"/>
             <a:ext cx="256092" cy="215627"/>
           </a:xfrm>
           <a:prstGeom prst="rect">
@@ -5093,7 +5547,7 @@
           </a:bodyPr>
           <a:lstStyle/>
           <a:p>
-            <a:pPr algn="l"/>
+            <a:pPr algn="ctr"/>
             <a:r>
               <a:rPr lang="en-US" sz="1100" dirty="0">
                 <a:solidFill>
@@ -5110,58 +5564,122 @@
       </p:sp>
       <p:sp>
         <p:nvSpPr>
-          <p:cNvPr id="17" name="TextBox 17"/>
-          <p:cNvSpPr txBox="1"/>
-          <p:nvPr/>
-        </p:nvSpPr>
-        <p:spPr>
-          <a:xfrm>
-            <a:off x="816864" y="4066222"/>
-            <a:ext cx="481584" cy="234696"/>
-          </a:xfrm>
-          <a:prstGeom prst="rect">
-            <a:avLst/>
-          </a:prstGeom>
-          <a:noFill/>
-          <a:ln>
-            <a:noFill/>
-          </a:ln>
-        </p:spPr>
-        <p:txBody>
-          <a:bodyPr wrap="none" lIns="0" tIns="0" rIns="0" bIns="0" anchor="t" anchorCtr="0">
-            <a:spAutoFit/>
-          </a:bodyPr>
-          <a:lstStyle/>
-          <a:p>
-            <a:pPr algn="l"/>
-            <a:r>
-              <a:rPr lang="en-US" sz="1200" dirty="0">
-                <a:solidFill>
-                  <a:srgbClr val="8B949E"/>
-                </a:solidFill>
-                <a:latin typeface="+mn-lt"/>
-                <a:ea typeface="+mn-ea"/>
-                <a:cs typeface="+mn-cs"/>
-              </a:rPr>
-              <a:t>2026E</a:t>
-            </a:r>
-          </a:p>
-        </p:txBody>
-      </p:sp>
-      <p:sp>
-        <p:nvSpPr>
-          <p:cNvPr id="18" name="Rectangle 18"/>
+          <p:cNvPr id="28" name="Rectangle 28"/>
           <p:cNvSpPr/>
           <p:nvPr/>
         </p:nvSpPr>
         <p:spPr>
           <a:xfrm>
-            <a:off x="2286000" y="3940492"/>
-            <a:ext cx="4783455" cy="623888"/>
+            <a:off x="4948238" y="4523422"/>
+            <a:ext cx="721995" cy="1236345"/>
           </a:xfrm>
           <a:prstGeom prst="roundRect">
             <a:avLst>
-              <a:gd name="adj" fmla="val 3053"/>
+              <a:gd name="adj" fmla="val 2639"/>
+            </a:avLst>
+          </a:prstGeom>
+          <a:solidFill>
+            <a:schemeClr val="accent5"/>
+          </a:solidFill>
+          <a:ln>
+            <a:noFill/>
+          </a:ln>
+        </p:spPr>
+      </p:sp>
+      <p:sp>
+        <p:nvSpPr>
+          <p:cNvPr id="29" name="TextBox 29"/>
+          <p:cNvSpPr txBox="1"/>
+          <p:nvPr/>
+        </p:nvSpPr>
+        <p:spPr>
+          <a:xfrm>
+            <a:off x="5181189" y="4473940"/>
+            <a:ext cx="256092" cy="215627"/>
+          </a:xfrm>
+          <a:prstGeom prst="rect">
+            <a:avLst/>
+          </a:prstGeom>
+          <a:noFill/>
+          <a:ln>
+            <a:noFill/>
+          </a:ln>
+        </p:spPr>
+        <p:txBody>
+          <a:bodyPr wrap="none" lIns="0" tIns="0" rIns="0" bIns="0" anchor="t" anchorCtr="0">
+            <a:spAutoFit/>
+          </a:bodyPr>
+          <a:lstStyle/>
+          <a:p>
+            <a:pPr algn="ctr"/>
+            <a:r>
+              <a:rPr lang="en-US" sz="1100" dirty="0">
+                <a:solidFill>
+                  <a:schemeClr val="accent5"/>
+                </a:solidFill>
+                <a:latin typeface="+mn-lt"/>
+                <a:ea typeface="+mn-ea"/>
+                <a:cs typeface="+mn-cs"/>
+              </a:rPr>
+              <a:t>420</a:t>
+            </a:r>
+          </a:p>
+        </p:txBody>
+      </p:sp>
+      <p:sp>
+        <p:nvSpPr>
+          <p:cNvPr id="30" name="TextBox 30"/>
+          <p:cNvSpPr txBox="1"/>
+          <p:nvPr/>
+        </p:nvSpPr>
+        <p:spPr>
+          <a:xfrm>
+            <a:off x="4700319" y="5837920"/>
+            <a:ext cx="337722" cy="215627"/>
+          </a:xfrm>
+          <a:prstGeom prst="rect">
+            <a:avLst/>
+          </a:prstGeom>
+          <a:noFill/>
+          <a:ln>
+            <a:noFill/>
+          </a:ln>
+        </p:spPr>
+        <p:txBody>
+          <a:bodyPr wrap="none" lIns="0" tIns="0" rIns="0" bIns="0" anchor="t" anchorCtr="0">
+            <a:spAutoFit/>
+          </a:bodyPr>
+          <a:lstStyle/>
+          <a:p>
+            <a:pPr algn="ctr"/>
+            <a:r>
+              <a:rPr lang="en-US" sz="1100" dirty="0">
+                <a:solidFill>
+                  <a:srgbClr val="8B949E"/>
+                </a:solidFill>
+                <a:latin typeface="+mn-lt"/>
+                <a:ea typeface="+mn-ea"/>
+                <a:cs typeface="+mn-cs"/>
+              </a:rPr>
+              <a:t>2025</a:t>
+            </a:r>
+          </a:p>
+        </p:txBody>
+      </p:sp>
+      <p:sp>
+        <p:nvSpPr>
+          <p:cNvPr id="31" name="Rectangle 31"/>
+          <p:cNvSpPr/>
+          <p:nvPr/>
+        </p:nvSpPr>
+        <p:spPr>
+          <a:xfrm>
+            <a:off x="6582728" y="4170045"/>
+            <a:ext cx="721995" cy="1590675"/>
+          </a:xfrm>
+          <a:prstGeom prst="roundRect">
+            <a:avLst>
+              <a:gd name="adj" fmla="val 2639"/>
             </a:avLst>
           </a:prstGeom>
           <a:solidFill>
@@ -5174,13 +5692,13 @@
       </p:sp>
       <p:sp>
         <p:nvSpPr>
-          <p:cNvPr id="19" name="TextBox 19"/>
-          <p:cNvSpPr txBox="1"/>
-          <p:nvPr/>
-        </p:nvSpPr>
-        <p:spPr>
-          <a:xfrm>
-            <a:off x="7155294" y="4053888"/>
+          <p:cNvPr id="32" name="TextBox 32"/>
+          <p:cNvSpPr txBox="1"/>
+          <p:nvPr/>
+        </p:nvSpPr>
+        <p:spPr>
+          <a:xfrm>
+            <a:off x="6815679" y="4120563"/>
             <a:ext cx="256092" cy="215627"/>
           </a:xfrm>
           <a:prstGeom prst="rect">
@@ -5197,7 +5715,7 @@
           </a:bodyPr>
           <a:lstStyle/>
           <a:p>
-            <a:pPr algn="l"/>
+            <a:pPr algn="ctr"/>
             <a:r>
               <a:rPr lang="en-US" sz="1100" dirty="0">
                 <a:solidFill>
@@ -5214,62 +5732,22 @@
       </p:sp>
       <p:sp>
         <p:nvSpPr>
-          <p:cNvPr id="20" name="TextBox 20"/>
-          <p:cNvSpPr txBox="1"/>
-          <p:nvPr/>
-        </p:nvSpPr>
-        <p:spPr>
-          <a:xfrm>
-            <a:off x="816864" y="5072062"/>
-            <a:ext cx="481584" cy="234696"/>
-          </a:xfrm>
-          <a:prstGeom prst="rect">
-            <a:avLst/>
-          </a:prstGeom>
-          <a:noFill/>
-          <a:ln>
-            <a:noFill/>
-          </a:ln>
-        </p:spPr>
-        <p:txBody>
-          <a:bodyPr wrap="none" lIns="0" tIns="0" rIns="0" bIns="0" anchor="t" anchorCtr="0">
-            <a:spAutoFit/>
-          </a:bodyPr>
-          <a:lstStyle/>
-          <a:p>
-            <a:pPr algn="l"/>
-            <a:r>
-              <a:rPr lang="en-US" sz="1200" dirty="0">
-                <a:solidFill>
-                  <a:srgbClr val="8B949E"/>
-                </a:solidFill>
-                <a:latin typeface="+mn-lt"/>
-                <a:ea typeface="+mn-ea"/>
-                <a:cs typeface="+mn-cs"/>
-              </a:rPr>
-              <a:t>2027E</a:t>
-            </a:r>
-          </a:p>
-        </p:txBody>
-      </p:sp>
-      <p:sp>
-        <p:nvSpPr>
-          <p:cNvPr id="21" name="Rectangle 21"/>
+          <p:cNvPr id="33" name="Rectangle 33"/>
           <p:cNvSpPr/>
           <p:nvPr/>
         </p:nvSpPr>
         <p:spPr>
           <a:xfrm>
-            <a:off x="2286000" y="4946332"/>
-            <a:ext cx="8503920" cy="623888"/>
+            <a:off x="7462838" y="3522345"/>
+            <a:ext cx="721995" cy="2238375"/>
           </a:xfrm>
           <a:prstGeom prst="roundRect">
             <a:avLst>
-              <a:gd name="adj" fmla="val 3053"/>
+              <a:gd name="adj" fmla="val 2639"/>
             </a:avLst>
           </a:prstGeom>
           <a:solidFill>
-            <a:schemeClr val="accent1"/>
+            <a:schemeClr val="accent5"/>
           </a:solidFill>
           <a:ln>
             <a:noFill/>
@@ -5278,13 +5756,13 @@
       </p:sp>
       <p:sp>
         <p:nvSpPr>
-          <p:cNvPr id="22" name="TextBox 22"/>
-          <p:cNvSpPr txBox="1"/>
-          <p:nvPr/>
-        </p:nvSpPr>
-        <p:spPr>
-          <a:xfrm>
-            <a:off x="10875759" y="5059728"/>
+          <p:cNvPr id="34" name="TextBox 34"/>
+          <p:cNvSpPr txBox="1"/>
+          <p:nvPr/>
+        </p:nvSpPr>
+        <p:spPr>
+          <a:xfrm>
+            <a:off x="7695789" y="3472863"/>
             <a:ext cx="256092" cy="215627"/>
           </a:xfrm>
           <a:prstGeom prst="rect">
@@ -5301,7 +5779,7 @@
           </a:bodyPr>
           <a:lstStyle/>
           <a:p>
-            <a:pPr algn="l"/>
+            <a:pPr algn="ctr"/>
             <a:r>
               <a:rPr lang="en-US" sz="1100" dirty="0">
                 <a:solidFill>
@@ -5311,6 +5789,110 @@
                 <a:ea typeface="+mn-ea"/>
                 <a:cs typeface="+mn-cs"/>
               </a:rPr>
+              <a:t>760</a:t>
+            </a:r>
+          </a:p>
+        </p:txBody>
+      </p:sp>
+      <p:sp>
+        <p:nvSpPr>
+          <p:cNvPr id="35" name="TextBox 35"/>
+          <p:cNvSpPr txBox="1"/>
+          <p:nvPr/>
+        </p:nvSpPr>
+        <p:spPr>
+          <a:xfrm>
+            <a:off x="7162552" y="5837920"/>
+            <a:ext cx="442455" cy="215627"/>
+          </a:xfrm>
+          <a:prstGeom prst="rect">
+            <a:avLst/>
+          </a:prstGeom>
+          <a:noFill/>
+          <a:ln>
+            <a:noFill/>
+          </a:ln>
+        </p:spPr>
+        <p:txBody>
+          <a:bodyPr wrap="none" lIns="0" tIns="0" rIns="0" bIns="0" anchor="t" anchorCtr="0">
+            <a:spAutoFit/>
+          </a:bodyPr>
+          <a:lstStyle/>
+          <a:p>
+            <a:pPr algn="ctr"/>
+            <a:r>
+              <a:rPr lang="en-US" sz="1100" dirty="0">
+                <a:solidFill>
+                  <a:srgbClr val="8B949E"/>
+                </a:solidFill>
+                <a:latin typeface="+mn-lt"/>
+                <a:ea typeface="+mn-ea"/>
+                <a:cs typeface="+mn-cs"/>
+              </a:rPr>
+              <a:t>2026E</a:t>
+            </a:r>
+          </a:p>
+        </p:txBody>
+      </p:sp>
+      <p:sp>
+        <p:nvSpPr>
+          <p:cNvPr id="36" name="Rectangle 36"/>
+          <p:cNvSpPr/>
+          <p:nvPr/>
+        </p:nvSpPr>
+        <p:spPr>
+          <a:xfrm>
+            <a:off x="9097328" y="2933700"/>
+            <a:ext cx="721995" cy="2827020"/>
+          </a:xfrm>
+          <a:prstGeom prst="roundRect">
+            <a:avLst>
+              <a:gd name="adj" fmla="val 2639"/>
+            </a:avLst>
+          </a:prstGeom>
+          <a:solidFill>
+            <a:schemeClr val="accent2"/>
+          </a:solidFill>
+          <a:ln>
+            <a:noFill/>
+          </a:ln>
+        </p:spPr>
+      </p:sp>
+      <p:sp>
+        <p:nvSpPr>
+          <p:cNvPr id="37" name="TextBox 37"/>
+          <p:cNvSpPr txBox="1"/>
+          <p:nvPr/>
+        </p:nvSpPr>
+        <p:spPr>
+          <a:xfrm>
+            <a:off x="9330279" y="2884218"/>
+            <a:ext cx="256092" cy="215627"/>
+          </a:xfrm>
+          <a:prstGeom prst="rect">
+            <a:avLst/>
+          </a:prstGeom>
+          <a:noFill/>
+          <a:ln>
+            <a:noFill/>
+          </a:ln>
+        </p:spPr>
+        <p:txBody>
+          <a:bodyPr wrap="none" lIns="0" tIns="0" rIns="0" bIns="0" anchor="t" anchorCtr="0">
+            <a:spAutoFit/>
+          </a:bodyPr>
+          <a:lstStyle/>
+          <a:p>
+            <a:pPr algn="ctr"/>
+            <a:r>
+              <a:rPr lang="en-US" sz="1100" dirty="0">
+                <a:solidFill>
+                  <a:schemeClr val="accent5"/>
+                </a:solidFill>
+                <a:latin typeface="+mn-lt"/>
+                <a:ea typeface="+mn-ea"/>
+                <a:cs typeface="+mn-cs"/>
+              </a:rPr>
               <a:t>960</a:t>
             </a:r>
           </a:p>
@@ -5318,7 +5900,111 @@
       </p:sp>
       <p:sp>
         <p:nvSpPr>
-          <p:cNvPr id="23" name="TextBox 23"/>
+          <p:cNvPr id="38" name="Rectangle 38"/>
+          <p:cNvSpPr/>
+          <p:nvPr/>
+        </p:nvSpPr>
+        <p:spPr>
+          <a:xfrm>
+            <a:off x="9977438" y="1991678"/>
+            <a:ext cx="721995" cy="3769042"/>
+          </a:xfrm>
+          <a:prstGeom prst="roundRect">
+            <a:avLst>
+              <a:gd name="adj" fmla="val 2639"/>
+            </a:avLst>
+          </a:prstGeom>
+          <a:solidFill>
+            <a:schemeClr val="accent2"/>
+          </a:solidFill>
+          <a:ln>
+            <a:noFill/>
+          </a:ln>
+        </p:spPr>
+      </p:sp>
+      <p:sp>
+        <p:nvSpPr>
+          <p:cNvPr id="39" name="TextBox 39"/>
+          <p:cNvSpPr txBox="1"/>
+          <p:nvPr/>
+        </p:nvSpPr>
+        <p:spPr>
+          <a:xfrm>
+            <a:off x="10169574" y="1941243"/>
+            <a:ext cx="337722" cy="215627"/>
+          </a:xfrm>
+          <a:prstGeom prst="rect">
+            <a:avLst/>
+          </a:prstGeom>
+          <a:noFill/>
+          <a:ln>
+            <a:noFill/>
+          </a:ln>
+        </p:spPr>
+        <p:txBody>
+          <a:bodyPr wrap="none" lIns="0" tIns="0" rIns="0" bIns="0" anchor="t" anchorCtr="0">
+            <a:spAutoFit/>
+          </a:bodyPr>
+          <a:lstStyle/>
+          <a:p>
+            <a:pPr algn="ctr"/>
+            <a:r>
+              <a:rPr lang="en-US" sz="1100" dirty="0">
+                <a:solidFill>
+                  <a:schemeClr val="accent5"/>
+                </a:solidFill>
+                <a:latin typeface="+mn-lt"/>
+                <a:ea typeface="+mn-ea"/>
+                <a:cs typeface="+mn-cs"/>
+              </a:rPr>
+              <a:t>1280</a:t>
+            </a:r>
+          </a:p>
+        </p:txBody>
+      </p:sp>
+      <p:sp>
+        <p:nvSpPr>
+          <p:cNvPr id="40" name="TextBox 40"/>
+          <p:cNvSpPr txBox="1"/>
+          <p:nvPr/>
+        </p:nvSpPr>
+        <p:spPr>
+          <a:xfrm>
+            <a:off x="9677152" y="5837920"/>
+            <a:ext cx="442455" cy="215627"/>
+          </a:xfrm>
+          <a:prstGeom prst="rect">
+            <a:avLst/>
+          </a:prstGeom>
+          <a:noFill/>
+          <a:ln>
+            <a:noFill/>
+          </a:ln>
+        </p:spPr>
+        <p:txBody>
+          <a:bodyPr wrap="none" lIns="0" tIns="0" rIns="0" bIns="0" anchor="t" anchorCtr="0">
+            <a:spAutoFit/>
+          </a:bodyPr>
+          <a:lstStyle/>
+          <a:p>
+            <a:pPr algn="ctr"/>
+            <a:r>
+              <a:rPr lang="en-US" sz="1100" dirty="0">
+                <a:solidFill>
+                  <a:srgbClr val="8B949E"/>
+                </a:solidFill>
+                <a:latin typeface="+mn-lt"/>
+                <a:ea typeface="+mn-ea"/>
+                <a:cs typeface="+mn-cs"/>
+              </a:rPr>
+              <a:t>2027E</a:t>
+            </a:r>
+          </a:p>
+        </p:txBody>
+      </p:sp>
+      <p:sp>
+        <p:nvSpPr>
+          <p:cNvPr id="41" name="TextBox 41"/>
           <p:cNvSpPr txBox="1"/>
           <p:nvPr/>
         </p:nvSpPr>
@@ -5358,7 +6044,7 @@
       </p:sp>
       <p:sp>
         <p:nvSpPr>
-          <p:cNvPr id="24" name="TextBox 24"/>
+          <p:cNvPr id="42" name="TextBox 42"/>
           <p:cNvSpPr txBox="1"/>
           <p:nvPr/>
         </p:nvSpPr>
@@ -5440,8 +6126,8 @@
         </p:nvSpPr>
         <p:spPr>
           <a:xfrm>
-            <a:off x="0" y="2834640"/>
-            <a:ext cx="12192000" cy="1188720"/>
+            <a:off x="0" y="2468880"/>
+            <a:ext cx="12192000" cy="1828800"/>
           </a:xfrm>
           <a:prstGeom prst="rect">
             <a:avLst/>
@@ -5462,8 +6148,8 @@
         </p:nvSpPr>
         <p:spPr>
           <a:xfrm>
-            <a:off x="0" y="2834640"/>
-            <a:ext cx="38100" cy="1188720"/>
+            <a:off x="0" y="2468880"/>
+            <a:ext cx="38100" cy="1828800"/>
           </a:xfrm>
           <a:prstGeom prst="rect">
             <a:avLst/>
@@ -5478,14 +6164,14 @@
       </p:sp>
       <p:sp>
         <p:nvSpPr>
-          <p:cNvPr id="4" name="Freeform 4"/>
+          <p:cNvPr id="4" name="Line 4"/>
           <p:cNvSpPr/>
           <p:nvPr/>
         </p:nvSpPr>
         <p:spPr>
           <a:xfrm>
-            <a:off x="723900" y="3104198"/>
-            <a:ext cx="233362" cy="374333"/>
+            <a:off x="3108960" y="2651760"/>
+            <a:ext cx="9525" cy="1463040"/>
           </a:xfrm>
           <a:custGeom>
             <a:avLst/>
@@ -5494,48 +6180,98 @@
             <a:cxnLst/>
             <a:rect l="l" t="t" r="r" b="b"/>
             <a:pathLst>
-              <a:path w="233362" h="374333">
+              <a:path w="9525" h="1463040">
                 <a:moveTo>
                   <a:pt x="0" y="0"/>
                 </a:moveTo>
                 <a:lnTo>
-                  <a:pt x="233362" y="0"/>
+                  <a:pt x="0" y="1463040"/>
                 </a:lnTo>
-                <a:lnTo>
-                  <a:pt x="233362" y="374333"/>
-                </a:lnTo>
-                <a:lnTo>
-                  <a:pt x="117157" y="280988"/>
-                </a:lnTo>
-                <a:lnTo>
-                  <a:pt x="0" y="374333"/>
-                </a:lnTo>
-                <a:lnTo>
-                  <a:pt x="0" y="0"/>
-                </a:lnTo>
-                <a:close/>
               </a:path>
             </a:pathLst>
           </a:custGeom>
           <a:noFill/>
-          <a:ln w="35242" cap="rnd">
+          <a:ln w="9525">
             <a:solidFill>
-              <a:schemeClr val="accent1"/>
+              <a:srgbClr val="30363D"/>
             </a:solidFill>
-            <a:round/>
-          </a:ln>
-        </p:spPr>
-      </p:sp>
-      <p:sp>
-        <p:nvSpPr>
-          <p:cNvPr id="5" name="TextBox 5"/>
-          <p:cNvSpPr txBox="1"/>
-          <p:nvPr/>
-        </p:nvSpPr>
-        <p:spPr>
-          <a:xfrm>
-            <a:off x="1537221" y="2976515"/>
-            <a:ext cx="2627815" cy="664483"/>
+          </a:ln>
+        </p:spPr>
+      </p:sp>
+      <p:sp>
+        <p:nvSpPr>
+          <p:cNvPr id="5" name="Ellipse 5"/>
+          <p:cNvSpPr/>
+          <p:nvPr/>
+        </p:nvSpPr>
+        <p:spPr>
+          <a:xfrm>
+            <a:off x="10297478" y="2799398"/>
+            <a:ext cx="1167765" cy="1167765"/>
+          </a:xfrm>
+          <a:prstGeom prst="ellipse">
+            <a:avLst/>
+          </a:prstGeom>
+          <a:noFill/>
+          <a:ln w="19050">
+            <a:solidFill>
+              <a:schemeClr val="accent1">
+                <a:alpha val="50000"/>
+              </a:schemeClr>
+            </a:solidFill>
+          </a:ln>
+        </p:spPr>
+      </p:sp>
+      <p:sp>
+        <p:nvSpPr>
+          <p:cNvPr id="6" name="TextBox 6"/>
+          <p:cNvSpPr txBox="1"/>
+          <p:nvPr/>
+        </p:nvSpPr>
+        <p:spPr>
+          <a:xfrm>
+            <a:off x="1063417" y="2892742"/>
+            <a:ext cx="1530767" cy="1847850"/>
+          </a:xfrm>
+          <a:prstGeom prst="rect">
+            <a:avLst/>
+          </a:prstGeom>
+          <a:noFill/>
+          <a:ln>
+            <a:noFill/>
+          </a:ln>
+        </p:spPr>
+        <p:txBody>
+          <a:bodyPr wrap="none" lIns="0" tIns="0" rIns="0" bIns="0" anchor="t" anchorCtr="0">
+            <a:spAutoFit/>
+          </a:bodyPr>
+          <a:lstStyle/>
+          <a:p>
+            <a:pPr algn="ctr"/>
+            <a:r>
+              <a:rPr lang="en-US" sz="9600" b="1" dirty="0">
+                <a:solidFill>
+                  <a:schemeClr val="accent2"/>
+                </a:solidFill>
+                <a:latin typeface="+mn-lt"/>
+                <a:ea typeface="+mn-ea"/>
+                <a:cs typeface="+mn-cs"/>
+              </a:rPr>
+              <a:t>02</a:t>
+            </a:r>
+          </a:p>
+        </p:txBody>
+      </p:sp>
+      <p:sp>
+        <p:nvSpPr>
+          <p:cNvPr id="7" name="TextBox 7"/>
+          <p:cNvSpPr txBox="1"/>
+          <p:nvPr/>
+        </p:nvSpPr>
+        <p:spPr>
+          <a:xfrm>
+            <a:off x="3366021" y="2702195"/>
+            <a:ext cx="1955479" cy="664483"/>
           </a:xfrm>
           <a:prstGeom prst="rect">
             <a:avLst/>
@@ -5561,20 +6297,20 @@
                 <a:ea typeface="+mn-ea"/>
                 <a:cs typeface="+mn-cs"/>
               </a:rPr>
-              <a:t>02 产品矩阵</a:t>
-            </a:r>
-          </a:p>
-        </p:txBody>
-      </p:sp>
-      <p:sp>
-        <p:nvSpPr>
-          <p:cNvPr id="6" name="TextBox 6"/>
-          <p:cNvSpPr txBox="1"/>
-          <p:nvPr/>
-        </p:nvSpPr>
-        <p:spPr>
-          <a:xfrm>
-            <a:off x="1547355" y="3933873"/>
+              <a:t>产品矩阵</a:t>
+            </a:r>
+          </a:p>
+        </p:txBody>
+      </p:sp>
+      <p:sp>
+        <p:nvSpPr>
+          <p:cNvPr id="8" name="TextBox 8"/>
+          <p:cNvSpPr txBox="1"/>
+          <p:nvPr/>
+        </p:nvSpPr>
+        <p:spPr>
+          <a:xfrm>
+            <a:off x="3376155" y="3888153"/>
             <a:ext cx="1335881" cy="274301"/>
           </a:xfrm>
           <a:prstGeom prst="rect">
@@ -8686,9 +9422,9 @@
 </file>
 
 <file path=ppt/theme/theme1.xml><?xml version="1.0" encoding="utf-8"?>
-<a:theme xmlns:a="http://schemas.openxmlformats.org/drawingml/2006/main" name="project">
+<a:theme xmlns:a="http://schemas.openxmlformats.org/drawingml/2006/main" name="hifi_project">
   <a:themeElements>
-    <a:clrScheme name="project">
+    <a:clrScheme name="hifi_project">
       <a:dk1>
         <a:srgbClr val="FFFFFF"/>
       </a:dk1>
@@ -8726,7 +9462,7 @@
         <a:srgbClr val="3FB950"/>
       </a:folHlink>
     </a:clrScheme>
-    <a:fontScheme name="project">
+    <a:fontScheme name="hifi_project">
       <a:majorFont>
         <a:latin typeface="Microsoft YaHei"/>
         <a:ea typeface="Microsoft YaHei"/>
@@ -8798,7 +9534,7 @@
         <a:font script="Geor" typeface="Sylfaen"/>
       </a:minorFont>
     </a:fontScheme>
-    <a:fmtScheme name="project">
+    <a:fmtScheme name="hifi_project">
       <a:fillStyleLst>
         <a:solidFill>
           <a:schemeClr val="phClr"/>
